--- a/reproductions/redshifty/papers/spectrumfm_status_2026-06-02.pptx
+++ b/reproductions/redshifty/papers/spectrumfm_status_2026-06-02.pptx
@@ -17,6 +17,9 @@
     <p:sldId id="265" r:id="rId16"/>
     <p:sldId id="266" r:id="rId17"/>
     <p:sldId id="267" r:id="rId18"/>
+    <p:sldId id="268" r:id="rId19"/>
+    <p:sldId id="269" r:id="rId20"/>
+    <p:sldId id="270" r:id="rId21"/>
   </p:sldIdLst>
   <p:sldSz cx="12188952" cy="6858000" type="screen4x3"/>
   <p:notesSz cx="6858000" cy="9144000"/>
@@ -3903,6 +3906,1620 @@
                   <a:srgbClr val="182C5B"/>
                 </a:solidFill>
               </a:rPr>
+              <a:t>Phase 16 — per-class redshift parity vs Redrock (Metric 1)</a:t>
+            </a:r>
+          </a:p>
+        </p:txBody>
+      </p:sp>
+      <p:sp>
+        <p:nvSpPr>
+          <p:cNvPr id="3" name="TextBox 2"/>
+          <p:cNvSpPr txBox="1"/>
+          <p:nvPr/>
+        </p:nvSpPr>
+        <p:spPr>
+          <a:xfrm>
+            <a:off x="457200" y="960120"/>
+            <a:ext cx="11274552" cy="457200"/>
+          </a:xfrm>
+          <a:prstGeom prst="rect">
+            <a:avLst/>
+          </a:prstGeom>
+          <a:noFill/>
+        </p:spPr>
+        <p:txBody>
+          <a:bodyPr wrap="none">
+            <a:spAutoFit/>
+          </a:bodyPr>
+          <a:lstStyle/>
+          <a:p>
+            <a:r>
+              <a:rPr sz="1500" b="0">
+                <a:solidFill>
+                  <a:srgbClr val="666666"/>
+                </a:solidFill>
+              </a:rPr>
+              <a:t>Honest encoder-masked |Δz|/(1+z); ZWARN=0 held-out set; pass = catastrophic rate within 5pp of zero</a:t>
+            </a:r>
+          </a:p>
+        </p:txBody>
+      </p:sp>
+      <p:graphicFrame>
+        <p:nvGraphicFramePr>
+          <p:cNvPr id="4" name="Table 3"/>
+          <p:cNvGraphicFramePr>
+            <a:graphicFrameLocks noGrp="1"/>
+          </p:cNvGraphicFramePr>
+          <p:nvPr/>
+        </p:nvGraphicFramePr>
+        <p:xfrm>
+          <a:off x="457200" y="457200"/>
+          <a:ext cx="10972800" cy="2834640"/>
+        </p:xfrm>
+        <a:graphic>
+          <a:graphicData uri="http://schemas.openxmlformats.org/drawingml/2006/table">
+            <a:tbl>
+              <a:tblPr firstRow="1" bandRow="1">
+                <a:tableStyleId>{5C22544A-7EE6-4342-B048-85BDC9FD1C3A}</a:tableStyleId>
+              </a:tblPr>
+              <a:tblGrid>
+                <a:gridCol w="2377440"/>
+                <a:gridCol w="1097280"/>
+                <a:gridCol w="2926080"/>
+                <a:gridCol w="2926080"/>
+                <a:gridCol w="1645920"/>
+              </a:tblGrid>
+              <a:tr h="472440">
+                <a:tc>
+                  <a:txBody>
+                    <a:bodyPr/>
+                    <a:lstStyle/>
+                    <a:p>
+                      <a:r>
+                        <a:rPr sz="1400" b="1">
+                          <a:solidFill>
+                            <a:srgbClr val="182C5B"/>
+                          </a:solidFill>
+                        </a:rPr>
+                        <a:t>class</a:t>
+                      </a:r>
+                    </a:p>
+                  </a:txBody>
+                  <a:tcPr/>
+                </a:tc>
+                <a:tc>
+                  <a:txBody>
+                    <a:bodyPr/>
+                    <a:lstStyle/>
+                    <a:p>
+                      <a:r>
+                        <a:rPr sz="1400" b="1">
+                          <a:solidFill>
+                            <a:srgbClr val="182C5B"/>
+                          </a:solidFill>
+                        </a:rPr>
+                        <a:t>N</a:t>
+                      </a:r>
+                    </a:p>
+                  </a:txBody>
+                  <a:tcPr/>
+                </a:tc>
+                <a:tc>
+                  <a:txBody>
+                    <a:bodyPr/>
+                    <a:lstStyle/>
+                    <a:p>
+                      <a:r>
+                        <a:rPr sz="1400" b="1">
+                          <a:solidFill>
+                            <a:srgbClr val="182C5B"/>
+                          </a:solidFill>
+                        </a:rPr>
+                        <a:t>catastrophic rate</a:t>
+                      </a:r>
+                    </a:p>
+                  </a:txBody>
+                  <a:tcPr/>
+                </a:tc>
+                <a:tc>
+                  <a:txBody>
+                    <a:bodyPr/>
+                    <a:lstStyle/>
+                    <a:p>
+                      <a:r>
+                        <a:rPr sz="1400" b="1">
+                          <a:solidFill>
+                            <a:srgbClr val="182C5B"/>
+                          </a:solidFill>
+                        </a:rPr>
+                        <a:t>median |Δz|/(1+z)</a:t>
+                      </a:r>
+                    </a:p>
+                  </a:txBody>
+                  <a:tcPr/>
+                </a:tc>
+                <a:tc>
+                  <a:txBody>
+                    <a:bodyPr/>
+                    <a:lstStyle/>
+                    <a:p>
+                      <a:r>
+                        <a:rPr sz="1400" b="1">
+                          <a:solidFill>
+                            <a:srgbClr val="182C5B"/>
+                          </a:solidFill>
+                        </a:rPr>
+                        <a:t>verdict</a:t>
+                      </a:r>
+                    </a:p>
+                  </a:txBody>
+                  <a:tcPr/>
+                </a:tc>
+              </a:tr>
+              <a:tr h="472440">
+                <a:tc>
+                  <a:txBody>
+                    <a:bodyPr/>
+                    <a:lstStyle/>
+                    <a:p>
+                      <a:r>
+                        <a:rPr sz="1400">
+                          <a:solidFill>
+                            <a:srgbClr val="222222"/>
+                          </a:solidFill>
+                        </a:rPr>
+                        <a:t>MWS (stars)</a:t>
+                      </a:r>
+                    </a:p>
+                  </a:txBody>
+                  <a:tcPr/>
+                </a:tc>
+                <a:tc>
+                  <a:txBody>
+                    <a:bodyPr/>
+                    <a:lstStyle/>
+                    <a:p>
+                      <a:r>
+                        <a:rPr sz="1400">
+                          <a:solidFill>
+                            <a:srgbClr val="222222"/>
+                          </a:solidFill>
+                        </a:rPr>
+                        <a:t>289</a:t>
+                      </a:r>
+                    </a:p>
+                  </a:txBody>
+                  <a:tcPr/>
+                </a:tc>
+                <a:tc>
+                  <a:txBody>
+                    <a:bodyPr/>
+                    <a:lstStyle/>
+                    <a:p>
+                      <a:r>
+                        <a:rPr sz="1400">
+                          <a:solidFill>
+                            <a:srgbClr val="222222"/>
+                          </a:solidFill>
+                        </a:rPr>
+                        <a:t>2.1%</a:t>
+                      </a:r>
+                    </a:p>
+                  </a:txBody>
+                  <a:tcPr/>
+                </a:tc>
+                <a:tc>
+                  <a:txBody>
+                    <a:bodyPr/>
+                    <a:lstStyle/>
+                    <a:p>
+                      <a:r>
+                        <a:rPr sz="1400">
+                          <a:solidFill>
+                            <a:srgbClr val="222222"/>
+                          </a:solidFill>
+                        </a:rPr>
+                        <a:t>0.0002</a:t>
+                      </a:r>
+                    </a:p>
+                  </a:txBody>
+                  <a:tcPr/>
+                </a:tc>
+                <a:tc>
+                  <a:txBody>
+                    <a:bodyPr/>
+                    <a:lstStyle/>
+                    <a:p>
+                      <a:r>
+                        <a:rPr sz="1400">
+                          <a:solidFill>
+                            <a:srgbClr val="222222"/>
+                          </a:solidFill>
+                        </a:rPr>
+                        <a:t>PASS</a:t>
+                      </a:r>
+                    </a:p>
+                  </a:txBody>
+                  <a:tcPr/>
+                </a:tc>
+              </a:tr>
+              <a:tr h="472440">
+                <a:tc>
+                  <a:txBody>
+                    <a:bodyPr/>
+                    <a:lstStyle/>
+                    <a:p>
+                      <a:r>
+                        <a:rPr sz="1400">
+                          <a:solidFill>
+                            <a:srgbClr val="222222"/>
+                          </a:solidFill>
+                        </a:rPr>
+                        <a:t>BGS</a:t>
+                      </a:r>
+                    </a:p>
+                  </a:txBody>
+                  <a:tcPr/>
+                </a:tc>
+                <a:tc>
+                  <a:txBody>
+                    <a:bodyPr/>
+                    <a:lstStyle/>
+                    <a:p>
+                      <a:r>
+                        <a:rPr sz="1400">
+                          <a:solidFill>
+                            <a:srgbClr val="222222"/>
+                          </a:solidFill>
+                        </a:rPr>
+                        <a:t>346</a:t>
+                      </a:r>
+                    </a:p>
+                  </a:txBody>
+                  <a:tcPr/>
+                </a:tc>
+                <a:tc>
+                  <a:txBody>
+                    <a:bodyPr/>
+                    <a:lstStyle/>
+                    <a:p>
+                      <a:r>
+                        <a:rPr sz="1400">
+                          <a:solidFill>
+                            <a:srgbClr val="222222"/>
+                          </a:solidFill>
+                        </a:rPr>
+                        <a:t>95.7%</a:t>
+                      </a:r>
+                    </a:p>
+                  </a:txBody>
+                  <a:tcPr/>
+                </a:tc>
+                <a:tc>
+                  <a:txBody>
+                    <a:bodyPr/>
+                    <a:lstStyle/>
+                    <a:p>
+                      <a:r>
+                        <a:rPr sz="1400">
+                          <a:solidFill>
+                            <a:srgbClr val="222222"/>
+                          </a:solidFill>
+                        </a:rPr>
+                        <a:t>0.0361</a:t>
+                      </a:r>
+                    </a:p>
+                  </a:txBody>
+                  <a:tcPr/>
+                </a:tc>
+                <a:tc>
+                  <a:txBody>
+                    <a:bodyPr/>
+                    <a:lstStyle/>
+                    <a:p>
+                      <a:r>
+                        <a:rPr sz="1400">
+                          <a:solidFill>
+                            <a:srgbClr val="222222"/>
+                          </a:solidFill>
+                        </a:rPr>
+                        <a:t>FAIL</a:t>
+                      </a:r>
+                    </a:p>
+                  </a:txBody>
+                  <a:tcPr/>
+                </a:tc>
+              </a:tr>
+              <a:tr h="472440">
+                <a:tc>
+                  <a:txBody>
+                    <a:bodyPr/>
+                    <a:lstStyle/>
+                    <a:p>
+                      <a:r>
+                        <a:rPr sz="1400">
+                          <a:solidFill>
+                            <a:srgbClr val="222222"/>
+                          </a:solidFill>
+                        </a:rPr>
+                        <a:t>LRG</a:t>
+                      </a:r>
+                    </a:p>
+                  </a:txBody>
+                  <a:tcPr/>
+                </a:tc>
+                <a:tc>
+                  <a:txBody>
+                    <a:bodyPr/>
+                    <a:lstStyle/>
+                    <a:p>
+                      <a:r>
+                        <a:rPr sz="1400">
+                          <a:solidFill>
+                            <a:srgbClr val="222222"/>
+                          </a:solidFill>
+                        </a:rPr>
+                        <a:t>202</a:t>
+                      </a:r>
+                    </a:p>
+                  </a:txBody>
+                  <a:tcPr/>
+                </a:tc>
+                <a:tc>
+                  <a:txBody>
+                    <a:bodyPr/>
+                    <a:lstStyle/>
+                    <a:p>
+                      <a:r>
+                        <a:rPr sz="1400">
+                          <a:solidFill>
+                            <a:srgbClr val="222222"/>
+                          </a:solidFill>
+                        </a:rPr>
+                        <a:t>97.5%</a:t>
+                      </a:r>
+                    </a:p>
+                  </a:txBody>
+                  <a:tcPr/>
+                </a:tc>
+                <a:tc>
+                  <a:txBody>
+                    <a:bodyPr/>
+                    <a:lstStyle/>
+                    <a:p>
+                      <a:r>
+                        <a:rPr sz="1400">
+                          <a:solidFill>
+                            <a:srgbClr val="222222"/>
+                          </a:solidFill>
+                        </a:rPr>
+                        <a:t>0.0630</a:t>
+                      </a:r>
+                    </a:p>
+                  </a:txBody>
+                  <a:tcPr/>
+                </a:tc>
+                <a:tc>
+                  <a:txBody>
+                    <a:bodyPr/>
+                    <a:lstStyle/>
+                    <a:p>
+                      <a:r>
+                        <a:rPr sz="1400">
+                          <a:solidFill>
+                            <a:srgbClr val="222222"/>
+                          </a:solidFill>
+                        </a:rPr>
+                        <a:t>FAIL</a:t>
+                      </a:r>
+                    </a:p>
+                  </a:txBody>
+                  <a:tcPr/>
+                </a:tc>
+              </a:tr>
+              <a:tr h="472440">
+                <a:tc>
+                  <a:txBody>
+                    <a:bodyPr/>
+                    <a:lstStyle/>
+                    <a:p>
+                      <a:r>
+                        <a:rPr sz="1400">
+                          <a:solidFill>
+                            <a:srgbClr val="222222"/>
+                          </a:solidFill>
+                        </a:rPr>
+                        <a:t>ELG</a:t>
+                      </a:r>
+                    </a:p>
+                  </a:txBody>
+                  <a:tcPr/>
+                </a:tc>
+                <a:tc>
+                  <a:txBody>
+                    <a:bodyPr/>
+                    <a:lstStyle/>
+                    <a:p>
+                      <a:r>
+                        <a:rPr sz="1400">
+                          <a:solidFill>
+                            <a:srgbClr val="222222"/>
+                          </a:solidFill>
+                        </a:rPr>
+                        <a:t>366</a:t>
+                      </a:r>
+                    </a:p>
+                  </a:txBody>
+                  <a:tcPr/>
+                </a:tc>
+                <a:tc>
+                  <a:txBody>
+                    <a:bodyPr/>
+                    <a:lstStyle/>
+                    <a:p>
+                      <a:r>
+                        <a:rPr sz="1400">
+                          <a:solidFill>
+                            <a:srgbClr val="222222"/>
+                          </a:solidFill>
+                        </a:rPr>
+                        <a:t>97.8%</a:t>
+                      </a:r>
+                    </a:p>
+                  </a:txBody>
+                  <a:tcPr/>
+                </a:tc>
+                <a:tc>
+                  <a:txBody>
+                    <a:bodyPr/>
+                    <a:lstStyle/>
+                    <a:p>
+                      <a:r>
+                        <a:rPr sz="1400">
+                          <a:solidFill>
+                            <a:srgbClr val="222222"/>
+                          </a:solidFill>
+                        </a:rPr>
+                        <a:t>0.1106</a:t>
+                      </a:r>
+                    </a:p>
+                  </a:txBody>
+                  <a:tcPr/>
+                </a:tc>
+                <a:tc>
+                  <a:txBody>
+                    <a:bodyPr/>
+                    <a:lstStyle/>
+                    <a:p>
+                      <a:r>
+                        <a:rPr sz="1400">
+                          <a:solidFill>
+                            <a:srgbClr val="222222"/>
+                          </a:solidFill>
+                        </a:rPr>
+                        <a:t>FAIL</a:t>
+                      </a:r>
+                    </a:p>
+                  </a:txBody>
+                  <a:tcPr/>
+                </a:tc>
+              </a:tr>
+              <a:tr h="472440">
+                <a:tc>
+                  <a:txBody>
+                    <a:bodyPr/>
+                    <a:lstStyle/>
+                    <a:p>
+                      <a:r>
+                        <a:rPr sz="1400">
+                          <a:solidFill>
+                            <a:srgbClr val="222222"/>
+                          </a:solidFill>
+                        </a:rPr>
+                        <a:t>QSO *</a:t>
+                      </a:r>
+                    </a:p>
+                  </a:txBody>
+                  <a:tcPr/>
+                </a:tc>
+                <a:tc>
+                  <a:txBody>
+                    <a:bodyPr/>
+                    <a:lstStyle/>
+                    <a:p>
+                      <a:r>
+                        <a:rPr sz="1400">
+                          <a:solidFill>
+                            <a:srgbClr val="222222"/>
+                          </a:solidFill>
+                        </a:rPr>
+                        <a:t>74</a:t>
+                      </a:r>
+                    </a:p>
+                  </a:txBody>
+                  <a:tcPr/>
+                </a:tc>
+                <a:tc>
+                  <a:txBody>
+                    <a:bodyPr/>
+                    <a:lstStyle/>
+                    <a:p>
+                      <a:r>
+                        <a:rPr sz="1400">
+                          <a:solidFill>
+                            <a:srgbClr val="222222"/>
+                          </a:solidFill>
+                        </a:rPr>
+                        <a:t>97.3%</a:t>
+                      </a:r>
+                    </a:p>
+                  </a:txBody>
+                  <a:tcPr/>
+                </a:tc>
+                <a:tc>
+                  <a:txBody>
+                    <a:bodyPr/>
+                    <a:lstStyle/>
+                    <a:p>
+                      <a:r>
+                        <a:rPr sz="1400">
+                          <a:solidFill>
+                            <a:srgbClr val="222222"/>
+                          </a:solidFill>
+                        </a:rPr>
+                        <a:t>0.1782</a:t>
+                      </a:r>
+                    </a:p>
+                  </a:txBody>
+                  <a:tcPr/>
+                </a:tc>
+                <a:tc>
+                  <a:txBody>
+                    <a:bodyPr/>
+                    <a:lstStyle/>
+                    <a:p>
+                      <a:r>
+                        <a:rPr sz="1400">
+                          <a:solidFill>
+                            <a:srgbClr val="222222"/>
+                          </a:solidFill>
+                        </a:rPr>
+                        <a:t>FAIL</a:t>
+                      </a:r>
+                    </a:p>
+                  </a:txBody>
+                  <a:tcPr/>
+                </a:tc>
+              </a:tr>
+            </a:tbl>
+          </a:graphicData>
+        </a:graphic>
+      </p:graphicFrame>
+      <p:sp>
+        <p:nvSpPr>
+          <p:cNvPr id="5" name="TextBox 4"/>
+          <p:cNvSpPr txBox="1"/>
+          <p:nvPr/>
+        </p:nvSpPr>
+        <p:spPr>
+          <a:xfrm>
+            <a:off x="457200" y="5120640"/>
+            <a:ext cx="11274552" cy="457200"/>
+          </a:xfrm>
+          <a:prstGeom prst="rect">
+            <a:avLst/>
+          </a:prstGeom>
+          <a:noFill/>
+        </p:spPr>
+        <p:txBody>
+          <a:bodyPr wrap="none">
+            <a:spAutoFit/>
+          </a:bodyPr>
+          <a:lstStyle/>
+          <a:p>
+            <a:r>
+              <a:rPr sz="1300" b="0">
+                <a:solidFill>
+                  <a:srgbClr val="C63A3A"/>
+                </a:solidFill>
+              </a:rPr>
+              <a:t>Only stars reach good-z parity. Failure ordering MWS≪BGS&lt;LRG&lt;ELG&lt;QSO tracks spectroscopic difficulty exactly → the metric is real. Coarse z is learned (60% within |Δz|/(1+z)&lt;0.05); DESI precision is not. V1≈V2 no-skip.</a:t>
+            </a:r>
+          </a:p>
+        </p:txBody>
+      </p:sp>
+      <p:sp>
+        <p:nvSpPr>
+          <p:cNvPr id="6" name="TextBox 5"/>
+          <p:cNvSpPr txBox="1"/>
+          <p:nvPr/>
+        </p:nvSpPr>
+        <p:spPr>
+          <a:xfrm>
+            <a:off x="457200" y="6400800"/>
+            <a:ext cx="11274552" cy="274320"/>
+          </a:xfrm>
+          <a:prstGeom prst="rect">
+            <a:avLst/>
+          </a:prstGeom>
+          <a:noFill/>
+        </p:spPr>
+        <p:txBody>
+          <a:bodyPr wrap="none">
+            <a:spAutoFit/>
+          </a:bodyPr>
+          <a:lstStyle/>
+          <a:p>
+            <a:r>
+              <a:rPr sz="1100" b="0">
+                <a:solidFill>
+                  <a:srgbClr val="666666"/>
+                </a:solidFill>
+              </a:rPr>
+              <a:t>tools/spectrumfm/eval_per_class.py (+ desi_targets.py); decode vs SPECTYPE 98.7% agree. * QSO Redrock-only comparator.</a:t>
+            </a:r>
+          </a:p>
+        </p:txBody>
+      </p:sp>
+    </p:spTree>
+  </p:cSld>
+  <p:clrMapOvr>
+    <a:masterClrMapping/>
+  </p:clrMapOvr>
+</p:sld>
+</file>
+
+<file path=ppt/slides/slide12.xml><?xml version="1.0" encoding="utf-8"?>
+<p:sld xmlns:a="http://schemas.openxmlformats.org/drawingml/2006/main" xmlns:p="http://schemas.openxmlformats.org/presentationml/2006/main" xmlns:r="http://schemas.openxmlformats.org/officeDocument/2006/relationships">
+  <p:cSld>
+    <p:spTree>
+      <p:nvGrpSpPr>
+        <p:cNvPr id="1" name=""/>
+        <p:cNvGrpSpPr/>
+        <p:nvPr/>
+      </p:nvGrpSpPr>
+      <p:grpSpPr/>
+      <p:sp>
+        <p:nvSpPr>
+          <p:cNvPr id="2" name="TextBox 1"/>
+          <p:cNvSpPr txBox="1"/>
+          <p:nvPr/>
+        </p:nvSpPr>
+        <p:spPr>
+          <a:xfrm>
+            <a:off x="457200" y="365760"/>
+            <a:ext cx="11274552" cy="731520"/>
+          </a:xfrm>
+          <a:prstGeom prst="rect">
+            <a:avLst/>
+          </a:prstGeom>
+          <a:noFill/>
+        </p:spPr>
+        <p:txBody>
+          <a:bodyPr wrap="none">
+            <a:spAutoFit/>
+          </a:bodyPr>
+          <a:lstStyle/>
+          <a:p>
+            <a:r>
+              <a:rPr sz="3200" b="1">
+                <a:solidFill>
+                  <a:srgbClr val="182C5B"/>
+                </a:solidFill>
+              </a:rPr>
+              <a:t>Phase 16 — frozen-encoder six-class probe</a:t>
+            </a:r>
+          </a:p>
+        </p:txBody>
+      </p:sp>
+      <p:sp>
+        <p:nvSpPr>
+          <p:cNvPr id="3" name="TextBox 2"/>
+          <p:cNvSpPr txBox="1"/>
+          <p:nvPr/>
+        </p:nvSpPr>
+        <p:spPr>
+          <a:xfrm>
+            <a:off x="457200" y="960120"/>
+            <a:ext cx="11274552" cy="457200"/>
+          </a:xfrm>
+          <a:prstGeom prst="rect">
+            <a:avLst/>
+          </a:prstGeom>
+          <a:noFill/>
+        </p:spPr>
+        <p:txBody>
+          <a:bodyPr wrap="none">
+            <a:spAutoFit/>
+          </a:bodyPr>
+          <a:lstStyle/>
+          <a:p>
+            <a:r>
+              <a:rPr sz="1500" b="0">
+                <a:solidFill>
+                  <a:srgbClr val="666666"/>
+                </a:solidFill>
+              </a:rPr>
+              <a:t>Linear probe on frozen mean-pooled encoder features (redshift token masked); healpix-disjoint split</a:t>
+            </a:r>
+          </a:p>
+        </p:txBody>
+      </p:sp>
+      <p:graphicFrame>
+        <p:nvGraphicFramePr>
+          <p:cNvPr id="4" name="Table 3"/>
+          <p:cNvGraphicFramePr>
+            <a:graphicFrameLocks noGrp="1"/>
+          </p:cNvGraphicFramePr>
+          <p:nvPr/>
+        </p:nvGraphicFramePr>
+        <p:xfrm>
+          <a:off x="457200" y="457200"/>
+          <a:ext cx="10789920" cy="2377440"/>
+        </p:xfrm>
+        <a:graphic>
+          <a:graphicData uri="http://schemas.openxmlformats.org/drawingml/2006/table">
+            <a:tbl>
+              <a:tblPr firstRow="1" bandRow="1">
+                <a:tableStyleId>{5C22544A-7EE6-4342-B048-85BDC9FD1C3A}</a:tableStyleId>
+              </a:tblPr>
+              <a:tblGrid>
+                <a:gridCol w="2377440"/>
+                <a:gridCol w="3291840"/>
+                <a:gridCol w="2743200"/>
+                <a:gridCol w="2377440"/>
+              </a:tblGrid>
+              <a:tr h="594360">
+                <a:tc>
+                  <a:txBody>
+                    <a:bodyPr/>
+                    <a:lstStyle/>
+                    <a:p>
+                      <a:r>
+                        <a:rPr sz="1300" b="1">
+                          <a:solidFill>
+                            <a:srgbClr val="182C5B"/>
+                          </a:solidFill>
+                        </a:rPr>
+                        <a:t>metric</a:t>
+                      </a:r>
+                    </a:p>
+                  </a:txBody>
+                  <a:tcPr/>
+                </a:tc>
+                <a:tc>
+                  <a:txBody>
+                    <a:bodyPr/>
+                    <a:lstStyle/>
+                    <a:p>
+                      <a:r>
+                        <a:rPr sz="1300" b="1">
+                          <a:solidFill>
+                            <a:srgbClr val="182C5B"/>
+                          </a:solidFill>
+                        </a:rPr>
+                        <a:t>V1</a:t>
+                      </a:r>
+                    </a:p>
+                  </a:txBody>
+                  <a:tcPr/>
+                </a:tc>
+                <a:tc>
+                  <a:txBody>
+                    <a:bodyPr/>
+                    <a:lstStyle/>
+                    <a:p>
+                      <a:r>
+                        <a:rPr sz="1300" b="1">
+                          <a:solidFill>
+                            <a:srgbClr val="182C5B"/>
+                          </a:solidFill>
+                        </a:rPr>
+                        <a:t>V2 no-skip</a:t>
+                      </a:r>
+                    </a:p>
+                  </a:txBody>
+                  <a:tcPr/>
+                </a:tc>
+                <a:tc>
+                  <a:txBody>
+                    <a:bodyPr/>
+                    <a:lstStyle/>
+                    <a:p>
+                      <a:r>
+                        <a:rPr sz="1300" b="1">
+                          <a:solidFill>
+                            <a:srgbClr val="182C5B"/>
+                          </a:solidFill>
+                        </a:rPr>
+                        <a:t>no-skill baseline</a:t>
+                      </a:r>
+                    </a:p>
+                  </a:txBody>
+                  <a:tcPr/>
+                </a:tc>
+              </a:tr>
+              <a:tr h="594360">
+                <a:tc>
+                  <a:txBody>
+                    <a:bodyPr/>
+                    <a:lstStyle/>
+                    <a:p>
+                      <a:r>
+                        <a:rPr sz="1300">
+                          <a:solidFill>
+                            <a:srgbClr val="222222"/>
+                          </a:solidFill>
+                        </a:rPr>
+                        <a:t>macro-F1</a:t>
+                      </a:r>
+                    </a:p>
+                  </a:txBody>
+                  <a:tcPr/>
+                </a:tc>
+                <a:tc>
+                  <a:txBody>
+                    <a:bodyPr/>
+                    <a:lstStyle/>
+                    <a:p>
+                      <a:r>
+                        <a:rPr sz="1300">
+                          <a:solidFill>
+                            <a:srgbClr val="222222"/>
+                          </a:solidFill>
+                        </a:rPr>
+                        <a:t>0.813</a:t>
+                      </a:r>
+                    </a:p>
+                  </a:txBody>
+                  <a:tcPr/>
+                </a:tc>
+                <a:tc>
+                  <a:txBody>
+                    <a:bodyPr/>
+                    <a:lstStyle/>
+                    <a:p>
+                      <a:r>
+                        <a:rPr sz="1300">
+                          <a:solidFill>
+                            <a:srgbClr val="222222"/>
+                          </a:solidFill>
+                        </a:rPr>
+                        <a:t>0.847</a:t>
+                      </a:r>
+                    </a:p>
+                  </a:txBody>
+                  <a:tcPr/>
+                </a:tc>
+                <a:tc>
+                  <a:txBody>
+                    <a:bodyPr/>
+                    <a:lstStyle/>
+                    <a:p>
+                      <a:r>
+                        <a:rPr sz="1300">
+                          <a:solidFill>
+                            <a:srgbClr val="222222"/>
+                          </a:solidFill>
+                        </a:rPr>
+                        <a:t>0.097</a:t>
+                      </a:r>
+                    </a:p>
+                  </a:txBody>
+                  <a:tcPr/>
+                </a:tc>
+              </a:tr>
+              <a:tr h="594360">
+                <a:tc>
+                  <a:txBody>
+                    <a:bodyPr/>
+                    <a:lstStyle/>
+                    <a:p>
+                      <a:r>
+                        <a:rPr sz="1300">
+                          <a:solidFill>
+                            <a:srgbClr val="222222"/>
+                          </a:solidFill>
+                        </a:rPr>
+                        <a:t>accuracy</a:t>
+                      </a:r>
+                    </a:p>
+                  </a:txBody>
+                  <a:tcPr/>
+                </a:tc>
+                <a:tc>
+                  <a:txBody>
+                    <a:bodyPr/>
+                    <a:lstStyle/>
+                    <a:p>
+                      <a:r>
+                        <a:rPr sz="1300">
+                          <a:solidFill>
+                            <a:srgbClr val="222222"/>
+                          </a:solidFill>
+                        </a:rPr>
+                        <a:t>0.858</a:t>
+                      </a:r>
+                    </a:p>
+                  </a:txBody>
+                  <a:tcPr/>
+                </a:tc>
+                <a:tc>
+                  <a:txBody>
+                    <a:bodyPr/>
+                    <a:lstStyle/>
+                    <a:p>
+                      <a:r>
+                        <a:rPr sz="1300">
+                          <a:solidFill>
+                            <a:srgbClr val="222222"/>
+                          </a:solidFill>
+                        </a:rPr>
+                        <a:t>0.886</a:t>
+                      </a:r>
+                    </a:p>
+                  </a:txBody>
+                  <a:tcPr/>
+                </a:tc>
+                <a:tc>
+                  <a:txBody>
+                    <a:bodyPr/>
+                    <a:lstStyle/>
+                    <a:p>
+                      <a:r>
+                        <a:rPr sz="1300">
+                          <a:solidFill>
+                            <a:srgbClr val="222222"/>
+                          </a:solidFill>
+                        </a:rPr>
+                        <a:t>0.321</a:t>
+                      </a:r>
+                    </a:p>
+                  </a:txBody>
+                  <a:tcPr/>
+                </a:tc>
+              </a:tr>
+              <a:tr h="594360">
+                <a:tc>
+                  <a:txBody>
+                    <a:bodyPr/>
+                    <a:lstStyle/>
+                    <a:p>
+                      <a:r>
+                        <a:rPr sz="1300">
+                          <a:solidFill>
+                            <a:srgbClr val="222222"/>
+                          </a:solidFill>
+                        </a:rPr>
+                        <a:t>per-class F1 (V2)</a:t>
+                      </a:r>
+                    </a:p>
+                  </a:txBody>
+                  <a:tcPr/>
+                </a:tc>
+                <a:tc>
+                  <a:txBody>
+                    <a:bodyPr/>
+                    <a:lstStyle/>
+                    <a:p>
+                      <a:r>
+                        <a:rPr sz="1300">
+                          <a:solidFill>
+                            <a:srgbClr val="222222"/>
+                          </a:solidFill>
+                        </a:rPr>
+                        <a:t>MWS .95 / BGS .92 / ELG .90</a:t>
+                      </a:r>
+                    </a:p>
+                  </a:txBody>
+                  <a:tcPr/>
+                </a:tc>
+                <a:tc>
+                  <a:txBody>
+                    <a:bodyPr/>
+                    <a:lstStyle/>
+                    <a:p>
+                      <a:r>
+                        <a:rPr sz="1300">
+                          <a:solidFill>
+                            <a:srgbClr val="222222"/>
+                          </a:solidFill>
+                        </a:rPr>
+                        <a:t>LRG .87 / QSO .61</a:t>
+                      </a:r>
+                    </a:p>
+                  </a:txBody>
+                  <a:tcPr/>
+                </a:tc>
+                <a:tc>
+                  <a:txBody>
+                    <a:bodyPr/>
+                    <a:lstStyle/>
+                    <a:p>
+                      <a:r>
+                        <a:rPr sz="1300">
+                          <a:solidFill>
+                            <a:srgbClr val="222222"/>
+                          </a:solidFill>
+                        </a:rPr>
+                        <a:t>—</a:t>
+                      </a:r>
+                    </a:p>
+                  </a:txBody>
+                  <a:tcPr/>
+                </a:tc>
+              </a:tr>
+            </a:tbl>
+          </a:graphicData>
+        </a:graphic>
+      </p:graphicFrame>
+      <p:sp>
+        <p:nvSpPr>
+          <p:cNvPr id="5" name="TextBox 4"/>
+          <p:cNvSpPr txBox="1"/>
+          <p:nvPr/>
+        </p:nvSpPr>
+        <p:spPr>
+          <a:xfrm>
+            <a:off x="457200" y="4572000"/>
+            <a:ext cx="11274552" cy="457200"/>
+          </a:xfrm>
+          <a:prstGeom prst="rect">
+            <a:avLst/>
+          </a:prstGeom>
+          <a:noFill/>
+        </p:spPr>
+        <p:txBody>
+          <a:bodyPr wrap="none">
+            <a:spAutoFit/>
+          </a:bodyPr>
+          <a:lstStyle/>
+          <a:p>
+            <a:r>
+              <a:rPr sz="1400" b="0">
+                <a:solidFill>
+                  <a:srgbClr val="C63A3A"/>
+                </a:solidFill>
+              </a:rPr>
+              <a:t>The encoder learns WHAT an object is (macro-F1 0.81–0.85, +0.72 over no-skill) even where it cannot pin HOW FAR (Metric 1). Classification capability and redshift precision are DISTINCT — the precision gap is not a representation problem.</a:t>
+            </a:r>
+          </a:p>
+        </p:txBody>
+      </p:sp>
+      <p:sp>
+        <p:nvSpPr>
+          <p:cNvPr id="6" name="TextBox 5"/>
+          <p:cNvSpPr txBox="1"/>
+          <p:nvPr/>
+        </p:nvSpPr>
+        <p:spPr>
+          <a:xfrm>
+            <a:off x="457200" y="5577840"/>
+            <a:ext cx="11274552" cy="457200"/>
+          </a:xfrm>
+          <a:prstGeom prst="rect">
+            <a:avLst/>
+          </a:prstGeom>
+          <a:noFill/>
+        </p:spPr>
+        <p:txBody>
+          <a:bodyPr wrap="none">
+            <a:spAutoFit/>
+          </a:bodyPr>
+          <a:lstStyle/>
+          <a:p>
+            <a:r>
+              <a:rPr sz="1300" b="0">
+                <a:solidFill>
+                  <a:srgbClr val="666666"/>
+                </a:solidFill>
+              </a:rPr>
+              <a:t>Only confusions are physical: QSO↔ELG (emission-line), LRG↔BGS (red galaxies).</a:t>
+            </a:r>
+          </a:p>
+        </p:txBody>
+      </p:sp>
+      <p:sp>
+        <p:nvSpPr>
+          <p:cNvPr id="7" name="TextBox 6"/>
+          <p:cNvSpPr txBox="1"/>
+          <p:nvPr/>
+        </p:nvSpPr>
+        <p:spPr>
+          <a:xfrm>
+            <a:off x="457200" y="6400800"/>
+            <a:ext cx="11274552" cy="274320"/>
+          </a:xfrm>
+          <a:prstGeom prst="rect">
+            <a:avLst/>
+          </a:prstGeom>
+          <a:noFill/>
+        </p:spPr>
+        <p:txBody>
+          <a:bodyPr wrap="none">
+            <a:spAutoFit/>
+          </a:bodyPr>
+          <a:lstStyle/>
+          <a:p>
+            <a:r>
+              <a:rPr sz="1100" b="0">
+                <a:solidFill>
+                  <a:srgbClr val="666666"/>
+                </a:solidFill>
+              </a:rPr>
+              <a:t>tools/spectrumfm/probe_six_class.py; supports the proposal's “one encoder, six classes” claim.</a:t>
+            </a:r>
+          </a:p>
+        </p:txBody>
+      </p:sp>
+    </p:spTree>
+  </p:cSld>
+  <p:clrMapOvr>
+    <a:masterClrMapping/>
+  </p:clrMapOvr>
+</p:sld>
+</file>
+
+<file path=ppt/slides/slide13.xml><?xml version="1.0" encoding="utf-8"?>
+<p:sld xmlns:a="http://schemas.openxmlformats.org/drawingml/2006/main" xmlns:p="http://schemas.openxmlformats.org/presentationml/2006/main" xmlns:r="http://schemas.openxmlformats.org/officeDocument/2006/relationships">
+  <p:cSld>
+    <p:spTree>
+      <p:nvGrpSpPr>
+        <p:cNvPr id="1" name=""/>
+        <p:cNvGrpSpPr/>
+        <p:nvPr/>
+      </p:nvGrpSpPr>
+      <p:grpSpPr/>
+      <p:sp>
+        <p:nvSpPr>
+          <p:cNvPr id="2" name="TextBox 1"/>
+          <p:cNvSpPr txBox="1"/>
+          <p:nvPr/>
+        </p:nvSpPr>
+        <p:spPr>
+          <a:xfrm>
+            <a:off x="457200" y="365760"/>
+            <a:ext cx="11274552" cy="731520"/>
+          </a:xfrm>
+          <a:prstGeom prst="rect">
+            <a:avLst/>
+          </a:prstGeom>
+          <a:noFill/>
+        </p:spPr>
+        <p:txBody>
+          <a:bodyPr wrap="none">
+            <a:spAutoFit/>
+          </a:bodyPr>
+          <a:lstStyle/>
+          <a:p>
+            <a:r>
+              <a:rPr sz="3200" b="1">
+                <a:solidFill>
+                  <a:srgbClr val="182C5B"/>
+                </a:solidFill>
+              </a:rPr>
+              <a:t>Phase 16 — physical-prior ablation: redshift equivariance</a:t>
+            </a:r>
+          </a:p>
+        </p:txBody>
+      </p:sp>
+      <p:sp>
+        <p:nvSpPr>
+          <p:cNvPr id="3" name="TextBox 2"/>
+          <p:cNvSpPr txBox="1"/>
+          <p:nvPr/>
+        </p:nvSpPr>
+        <p:spPr>
+          <a:xfrm>
+            <a:off x="457200" y="960120"/>
+            <a:ext cx="11274552" cy="457200"/>
+          </a:xfrm>
+          <a:prstGeom prst="rect">
+            <a:avLst/>
+          </a:prstGeom>
+          <a:noFill/>
+        </p:spPr>
+        <p:txBody>
+          <a:bodyPr wrap="none">
+            <a:spAutoFit/>
+          </a:bodyPr>
+          <a:lstStyle/>
+          <a:p>
+            <a:r>
+              <a:rPr sz="1500" b="0">
+                <a:solidFill>
+                  <a:srgbClr val="666666"/>
+                </a:solidFill>
+              </a:rPr>
+              <a:t>Self-supervised: shift a spectrum by δz → require predicted z to move by δz (flag-gated, default-off)</a:t>
+            </a:r>
+          </a:p>
+        </p:txBody>
+      </p:sp>
+      <p:graphicFrame>
+        <p:nvGraphicFramePr>
+          <p:cNvPr id="4" name="Table 3"/>
+          <p:cNvGraphicFramePr>
+            <a:graphicFrameLocks noGrp="1"/>
+          </p:cNvGraphicFramePr>
+          <p:nvPr/>
+        </p:nvGraphicFramePr>
+        <p:xfrm>
+          <a:off x="457200" y="457200"/>
+          <a:ext cx="10241280" cy="2468880"/>
+        </p:xfrm>
+        <a:graphic>
+          <a:graphicData uri="http://schemas.openxmlformats.org/drawingml/2006/table">
+            <a:tbl>
+              <a:tblPr firstRow="1" bandRow="1">
+                <a:tableStyleId>{5C22544A-7EE6-4342-B048-85BDC9FD1C3A}</a:tableStyleId>
+              </a:tblPr>
+              <a:tblGrid>
+                <a:gridCol w="5486400"/>
+                <a:gridCol w="2377440"/>
+                <a:gridCol w="2377440"/>
+              </a:tblGrid>
+              <a:tr h="617220">
+                <a:tc>
+                  <a:txBody>
+                    <a:bodyPr/>
+                    <a:lstStyle/>
+                    <a:p>
+                      <a:r>
+                        <a:rPr sz="1400" b="1">
+                          <a:solidFill>
+                            <a:srgbClr val="182C5B"/>
+                          </a:solidFill>
+                        </a:rPr>
+                        <a:t>equivariance response  d E[z]/d(δz)  (ideal 1.0)</a:t>
+                      </a:r>
+                    </a:p>
+                  </a:txBody>
+                  <a:tcPr/>
+                </a:tc>
+                <a:tc>
+                  <a:txBody>
+                    <a:bodyPr/>
+                    <a:lstStyle/>
+                    <a:p>
+                      <a:r>
+                        <a:rPr sz="1400" b="1">
+                          <a:solidFill>
+                            <a:srgbClr val="182C5B"/>
+                          </a:solidFill>
+                        </a:rPr>
+                        <a:t>V1 control</a:t>
+                      </a:r>
+                    </a:p>
+                  </a:txBody>
+                  <a:tcPr/>
+                </a:tc>
+                <a:tc>
+                  <a:txBody>
+                    <a:bodyPr/>
+                    <a:lstStyle/>
+                    <a:p>
+                      <a:r>
+                        <a:rPr sz="1400" b="1">
+                          <a:solidFill>
+                            <a:srgbClr val="182C5B"/>
+                          </a:solidFill>
+                        </a:rPr>
+                        <a:t>eqprior</a:t>
+                      </a:r>
+                    </a:p>
+                  </a:txBody>
+                  <a:tcPr/>
+                </a:tc>
+              </a:tr>
+              <a:tr h="617220">
+                <a:tc>
+                  <a:txBody>
+                    <a:bodyPr/>
+                    <a:lstStyle/>
+                    <a:p>
+                      <a:r>
+                        <a:rPr sz="1400">
+                          <a:solidFill>
+                            <a:srgbClr val="222222"/>
+                          </a:solidFill>
+                        </a:rPr>
+                        <a:t>δz = +0.05</a:t>
+                      </a:r>
+                    </a:p>
+                  </a:txBody>
+                  <a:tcPr/>
+                </a:tc>
+                <a:tc>
+                  <a:txBody>
+                    <a:bodyPr/>
+                    <a:lstStyle/>
+                    <a:p>
+                      <a:r>
+                        <a:rPr sz="1400">
+                          <a:solidFill>
+                            <a:srgbClr val="222222"/>
+                          </a:solidFill>
+                        </a:rPr>
+                        <a:t>0.00</a:t>
+                      </a:r>
+                    </a:p>
+                  </a:txBody>
+                  <a:tcPr/>
+                </a:tc>
+                <a:tc>
+                  <a:txBody>
+                    <a:bodyPr/>
+                    <a:lstStyle/>
+                    <a:p>
+                      <a:r>
+                        <a:rPr sz="1400">
+                          <a:solidFill>
+                            <a:srgbClr val="222222"/>
+                          </a:solidFill>
+                        </a:rPr>
+                        <a:t>0.35</a:t>
+                      </a:r>
+                    </a:p>
+                  </a:txBody>
+                  <a:tcPr/>
+                </a:tc>
+              </a:tr>
+              <a:tr h="617220">
+                <a:tc>
+                  <a:txBody>
+                    <a:bodyPr/>
+                    <a:lstStyle/>
+                    <a:p>
+                      <a:r>
+                        <a:rPr sz="1400">
+                          <a:solidFill>
+                            <a:srgbClr val="222222"/>
+                          </a:solidFill>
+                        </a:rPr>
+                        <a:t>δz = +0.10</a:t>
+                      </a:r>
+                    </a:p>
+                  </a:txBody>
+                  <a:tcPr/>
+                </a:tc>
+                <a:tc>
+                  <a:txBody>
+                    <a:bodyPr/>
+                    <a:lstStyle/>
+                    <a:p>
+                      <a:r>
+                        <a:rPr sz="1400">
+                          <a:solidFill>
+                            <a:srgbClr val="222222"/>
+                          </a:solidFill>
+                        </a:rPr>
+                        <a:t>0.10</a:t>
+                      </a:r>
+                    </a:p>
+                  </a:txBody>
+                  <a:tcPr/>
+                </a:tc>
+                <a:tc>
+                  <a:txBody>
+                    <a:bodyPr/>
+                    <a:lstStyle/>
+                    <a:p>
+                      <a:r>
+                        <a:rPr sz="1400">
+                          <a:solidFill>
+                            <a:srgbClr val="222222"/>
+                          </a:solidFill>
+                        </a:rPr>
+                        <a:t>0.27</a:t>
+                      </a:r>
+                    </a:p>
+                  </a:txBody>
+                  <a:tcPr/>
+                </a:tc>
+              </a:tr>
+              <a:tr h="617220">
+                <a:tc>
+                  <a:txBody>
+                    <a:bodyPr/>
+                    <a:lstStyle/>
+                    <a:p>
+                      <a:r>
+                        <a:rPr sz="1400">
+                          <a:solidFill>
+                            <a:srgbClr val="222222"/>
+                          </a:solidFill>
+                        </a:rPr>
+                        <a:t>δz = +0.20</a:t>
+                      </a:r>
+                    </a:p>
+                  </a:txBody>
+                  <a:tcPr/>
+                </a:tc>
+                <a:tc>
+                  <a:txBody>
+                    <a:bodyPr/>
+                    <a:lstStyle/>
+                    <a:p>
+                      <a:r>
+                        <a:rPr sz="1400">
+                          <a:solidFill>
+                            <a:srgbClr val="222222"/>
+                          </a:solidFill>
+                        </a:rPr>
+                        <a:t>0.15</a:t>
+                      </a:r>
+                    </a:p>
+                  </a:txBody>
+                  <a:tcPr/>
+                </a:tc>
+                <a:tc>
+                  <a:txBody>
+                    <a:bodyPr/>
+                    <a:lstStyle/>
+                    <a:p>
+                      <a:r>
+                        <a:rPr sz="1400">
+                          <a:solidFill>
+                            <a:srgbClr val="222222"/>
+                          </a:solidFill>
+                        </a:rPr>
+                        <a:t>0.14</a:t>
+                      </a:r>
+                    </a:p>
+                  </a:txBody>
+                  <a:tcPr/>
+                </a:tc>
+              </a:tr>
+            </a:tbl>
+          </a:graphicData>
+        </a:graphic>
+      </p:graphicFrame>
+      <p:sp>
+        <p:nvSpPr>
+          <p:cNvPr id="5" name="TextBox 4"/>
+          <p:cNvSpPr txBox="1"/>
+          <p:nvPr/>
+        </p:nvSpPr>
+        <p:spPr>
+          <a:xfrm>
+            <a:off x="457200" y="4572000"/>
+            <a:ext cx="11274552" cy="457200"/>
+          </a:xfrm>
+          <a:prstGeom prst="rect">
+            <a:avLst/>
+          </a:prstGeom>
+          <a:noFill/>
+        </p:spPr>
+        <p:txBody>
+          <a:bodyPr wrap="none">
+            <a:spAutoFit/>
+          </a:bodyPr>
+          <a:lstStyle/>
+          <a:p>
+            <a:r>
+              <a:rPr sz="1400" b="0">
+                <a:solidFill>
+                  <a:srgbClr val="C63A3A"/>
+                </a:solidFill>
+              </a:rPr>
+              <a:t>Prior WORKS mechanically (non-equivariant 0.00 → 0.35 at small shifts) but per-class catastrophic rate is UNCHANGED (aggregate good-z 24.1% → 24.5%).</a:t>
+            </a:r>
+          </a:p>
+        </p:txBody>
+      </p:sp>
+      <p:sp>
+        <p:nvSpPr>
+          <p:cNvPr id="6" name="TextBox 5"/>
+          <p:cNvSpPr txBox="1"/>
+          <p:nvPr/>
+        </p:nvSpPr>
+        <p:spPr>
+          <a:xfrm>
+            <a:off x="457200" y="5486400"/>
+            <a:ext cx="11274552" cy="457200"/>
+          </a:xfrm>
+          <a:prstGeom prst="rect">
+            <a:avLst/>
+          </a:prstGeom>
+          <a:noFill/>
+        </p:spPr>
+        <p:txBody>
+          <a:bodyPr wrap="none">
+            <a:spAutoFit/>
+          </a:bodyPr>
+          <a:lstStyle/>
+          <a:p>
+            <a:r>
+              <a:rPr sz="1300" b="0">
+                <a:solidFill>
+                  <a:srgbClr val="182C5B"/>
+                </a:solidFill>
+              </a:rPr>
+              <a:t>Principled null: equivariance is shift-CONSISTENCY; galaxy |Δz| (~0.04–0.18) is off by 10–50× the 0.0033 threshold. Consistency cannot fix absolute error → SCALE is the lever.</a:t>
+            </a:r>
+          </a:p>
+        </p:txBody>
+      </p:sp>
+      <p:sp>
+        <p:nvSpPr>
+          <p:cNvPr id="7" name="TextBox 6"/>
+          <p:cNvSpPr txBox="1"/>
+          <p:nvPr/>
+        </p:nvSpPr>
+        <p:spPr>
+          <a:xfrm>
+            <a:off x="457200" y="6400800"/>
+            <a:ext cx="11274552" cy="274320"/>
+          </a:xfrm>
+          <a:prstGeom prst="rect">
+            <a:avLst/>
+          </a:prstGeom>
+          <a:noFill/>
+        </p:spPr>
+        <p:txBody>
+          <a:bodyPr wrap="none">
+            <a:spAutoFit/>
+          </a:bodyPr>
+          <a:lstStyle/>
+          <a:p>
+            <a:r>
+              <a:rPr sz="1100" b="0">
+                <a:solidFill>
+                  <a:srgbClr val="666666"/>
+                </a:solidFill>
+              </a:rPr>
+              <a:t>nersc/physical_priors.py; 15k-step matched treatment vs V1 control, both L4s.</a:t>
+            </a:r>
+          </a:p>
+        </p:txBody>
+      </p:sp>
+    </p:spTree>
+  </p:cSld>
+  <p:clrMapOvr>
+    <a:masterClrMapping/>
+  </p:clrMapOvr>
+</p:sld>
+</file>
+
+<file path=ppt/slides/slide14.xml><?xml version="1.0" encoding="utf-8"?>
+<p:sld xmlns:a="http://schemas.openxmlformats.org/drawingml/2006/main" xmlns:p="http://schemas.openxmlformats.org/presentationml/2006/main" xmlns:r="http://schemas.openxmlformats.org/officeDocument/2006/relationships">
+  <p:cSld>
+    <p:spTree>
+      <p:nvGrpSpPr>
+        <p:cNvPr id="1" name=""/>
+        <p:cNvGrpSpPr/>
+        <p:nvPr/>
+      </p:nvGrpSpPr>
+      <p:grpSpPr/>
+      <p:sp>
+        <p:nvSpPr>
+          <p:cNvPr id="2" name="TextBox 1"/>
+          <p:cNvSpPr txBox="1"/>
+          <p:nvPr/>
+        </p:nvSpPr>
+        <p:spPr>
+          <a:xfrm>
+            <a:off x="457200" y="365760"/>
+            <a:ext cx="11274552" cy="731520"/>
+          </a:xfrm>
+          <a:prstGeom prst="rect">
+            <a:avLst/>
+          </a:prstGeom>
+          <a:noFill/>
+        </p:spPr>
+        <p:txBody>
+          <a:bodyPr wrap="none">
+            <a:spAutoFit/>
+          </a:bodyPr>
+          <a:lstStyle/>
+          <a:p>
+            <a:r>
+              <a:rPr sz="3200" b="1">
+                <a:solidFill>
+                  <a:srgbClr val="182C5B"/>
+                </a:solidFill>
+              </a:rPr>
               <a:t>What's next</a:t>
             </a:r>
           </a:p>
@@ -3932,7 +5549,7 @@
           <a:p>
             <a:pPr/>
             <a:r>
-              <a:rPr sz="1500">
+              <a:rPr sz="1400">
                 <a:solidFill>
                   <a:srgbClr val="222222"/>
                 </a:solidFill>
@@ -3954,7 +5571,7 @@
           <a:p>
             <a:pPr/>
             <a:r>
-              <a:rPr sz="1500">
+              <a:rPr sz="1400">
                 <a:solidFill>
                   <a:srgbClr val="222222"/>
                 </a:solidFill>
@@ -3976,7 +5593,7 @@
           <a:p>
             <a:pPr/>
             <a:r>
-              <a:rPr sz="1500">
+              <a:rPr sz="1400">
                 <a:solidFill>
                   <a:srgbClr val="222222"/>
                 </a:solidFill>
@@ -3998,12 +5615,12 @@
           <a:p>
             <a:pPr/>
             <a:r>
-              <a:rPr sz="1500">
+              <a:rPr sz="1400">
                 <a:solidFill>
                   <a:srgbClr val="222222"/>
                 </a:solidFill>
               </a:rPr>
-              <a:t>• Next: scale steps/data toward the NERSC 73.8% peak (local config plateaus ~55%)</a:t>
+              <a:t>• DONE: Phase-16 evaluation framework — per-class Metric-1 eval + frozen six-class probe</a:t>
             </a:r>
           </a:p>
           <a:p>
@@ -4014,13 +5631,57 @@
                   <a:srgbClr val="222222"/>
                 </a:solidFill>
               </a:rPr>
-              <a:t>– Optional: codecs multi-token expansion to use all 3 RFSQ residual layers</a:t>
+              <a:t>– Metric 1 not met at scale (only stars); encoder learns class strongly (macro-F1 0.81–0.85)</a:t>
             </a:r>
           </a:p>
           <a:p>
             <a:pPr/>
             <a:r>
-              <a:rPr sz="1500">
+              <a:rPr sz="1400">
+                <a:solidFill>
+                  <a:srgbClr val="222222"/>
+                </a:solidFill>
+              </a:rPr>
+              <a:t>• DONE: physical-prior ablation (redshift equivariance) — works mechanically, no precision gain</a:t>
+            </a:r>
+          </a:p>
+          <a:p>
+            <a:pPr lvl="1"/>
+            <a:r>
+              <a:rPr sz="1400">
+                <a:solidFill>
+                  <a:srgbClr val="222222"/>
+                </a:solidFill>
+              </a:rPr>
+              <a:t>– Equivariance &amp; absolute precision are decoupled → scale, not aux losses, is the lever</a:t>
+            </a:r>
+          </a:p>
+          <a:p>
+            <a:pPr/>
+            <a:r>
+              <a:rPr sz="1400">
+                <a:solidFill>
+                  <a:srgbClr val="222222"/>
+                </a:solidFill>
+              </a:rPr>
+              <a:t>• Next: local data×model-size scaling ladder (per-point metric = Metric-1 cat. rate + probe-F1)</a:t>
+            </a:r>
+          </a:p>
+          <a:p>
+            <a:pPr lvl="1"/>
+            <a:r>
+              <a:rPr sz="1400">
+                <a:solidFill>
+                  <a:srgbClr val="222222"/>
+                </a:solidFill>
+              </a:rPr>
+              <a:t>– Then the full-DR1 / 250M–1B-param NERSC spec, with eval_per_class.py as the completion gate</a:t>
+            </a:r>
+          </a:p>
+          <a:p>
+            <a:pPr/>
+            <a:r>
+              <a:rPr sz="1400">
                 <a:solidFill>
                   <a:srgbClr val="222222"/>
                 </a:solidFill>
@@ -4058,7 +5719,7 @@
                   <a:srgbClr val="666666"/>
                 </a:solidFill>
               </a:rPr>
-              <a:t>None of the next items depend on NERSC compute.</a:t>
+              <a:t>Local prototyping done; precision now requires NERSC-scale compute (the proposal's Phase-I premise).</a:t>
             </a:r>
           </a:p>
         </p:txBody>
@@ -4071,7 +5732,7 @@
 </p:sld>
 </file>
 
-<file path=ppt/slides/slide12.xml><?xml version="1.0" encoding="utf-8"?>
+<file path=ppt/slides/slide15.xml><?xml version="1.0" encoding="utf-8"?>
 <p:sld xmlns:a="http://schemas.openxmlformats.org/drawingml/2006/main" xmlns:p="http://schemas.openxmlformats.org/presentationml/2006/main" xmlns:r="http://schemas.openxmlformats.org/officeDocument/2006/relationships">
   <p:cSld>
     <p:spTree>

--- a/reproductions/redshifty/papers/spectrumfm_status_2026-06-02.pptx
+++ b/reproductions/redshifty/papers/spectrumfm_status_2026-06-02.pptx
@@ -20,6 +20,7 @@
     <p:sldId id="268" r:id="rId19"/>
     <p:sldId id="269" r:id="rId20"/>
     <p:sldId id="270" r:id="rId21"/>
+    <p:sldId id="271" r:id="rId22"/>
   </p:sldIdLst>
   <p:sldSz cx="12188952" cy="6858000" type="screen4x3"/>
   <p:notesSz cx="6858000" cy="9144000"/>
@@ -5520,6 +5521,587 @@
                   <a:srgbClr val="182C5B"/>
                 </a:solidFill>
               </a:rPr>
+              <a:t>Phase 17 — is tokenizer compression the bottleneck? (No)</a:t>
+            </a:r>
+          </a:p>
+        </p:txBody>
+      </p:sp>
+      <p:sp>
+        <p:nvSpPr>
+          <p:cNvPr id="3" name="TextBox 2"/>
+          <p:cNvSpPr txBox="1"/>
+          <p:nvPr/>
+        </p:nvSpPr>
+        <p:spPr>
+          <a:xfrm>
+            <a:off x="457200" y="960120"/>
+            <a:ext cx="11274552" cy="457200"/>
+          </a:xfrm>
+          <a:prstGeom prst="rect">
+            <a:avLst/>
+          </a:prstGeom>
+          <a:noFill/>
+        </p:spPr>
+        <p:txBody>
+          <a:bodyPr wrap="none">
+            <a:spAutoFit/>
+          </a:bodyPr>
+          <a:lstStyle/>
+          <a:p>
+            <a:r>
+              <a:rPr sz="1500" b="0">
+                <a:solidFill>
+                  <a:srgbClr val="666666"/>
+                </a:solidFill>
+              </a:rPr>
+              <a:t>Finer 16x / 544-token tokenizer (~12 A/tok) vs 32x V1 (~23.5 A/tok); matched 15k arms, max_seq_len 1024</a:t>
+            </a:r>
+          </a:p>
+        </p:txBody>
+      </p:sp>
+      <p:graphicFrame>
+        <p:nvGraphicFramePr>
+          <p:cNvPr id="4" name="Table 3"/>
+          <p:cNvGraphicFramePr>
+            <a:graphicFrameLocks noGrp="1"/>
+          </p:cNvGraphicFramePr>
+          <p:nvPr/>
+        </p:nvGraphicFramePr>
+        <p:xfrm>
+          <a:off x="457200" y="457200"/>
+          <a:ext cx="11155680" cy="2377440"/>
+        </p:xfrm>
+        <a:graphic>
+          <a:graphicData uri="http://schemas.openxmlformats.org/drawingml/2006/table">
+            <a:tbl>
+              <a:tblPr firstRow="1" bandRow="1">
+                <a:tableStyleId>{5C22544A-7EE6-4342-B048-85BDC9FD1C3A}</a:tableStyleId>
+              </a:tblPr>
+              <a:tblGrid>
+                <a:gridCol w="2743200"/>
+                <a:gridCol w="4206240"/>
+                <a:gridCol w="4206240"/>
+              </a:tblGrid>
+              <a:tr h="339634">
+                <a:tc>
+                  <a:txBody>
+                    <a:bodyPr/>
+                    <a:lstStyle/>
+                    <a:p>
+                      <a:r>
+                        <a:rPr sz="1300" b="1">
+                          <a:solidFill>
+                            <a:srgbClr val="182C5B"/>
+                          </a:solidFill>
+                        </a:rPr>
+                        <a:t>class</a:t>
+                      </a:r>
+                    </a:p>
+                  </a:txBody>
+                  <a:tcPr/>
+                </a:tc>
+                <a:tc>
+                  <a:txBody>
+                    <a:bodyPr/>
+                    <a:lstStyle/>
+                    <a:p>
+                      <a:r>
+                        <a:rPr sz="1300" b="1">
+                          <a:solidFill>
+                            <a:srgbClr val="182C5B"/>
+                          </a:solidFill>
+                        </a:rPr>
+                        <a:t>V1 cat% / med|dz|</a:t>
+                      </a:r>
+                    </a:p>
+                  </a:txBody>
+                  <a:tcPr/>
+                </a:tc>
+                <a:tc>
+                  <a:txBody>
+                    <a:bodyPr/>
+                    <a:lstStyle/>
+                    <a:p>
+                      <a:r>
+                        <a:rPr sz="1300" b="1">
+                          <a:solidFill>
+                            <a:srgbClr val="182C5B"/>
+                          </a:solidFill>
+                        </a:rPr>
+                        <a:t>finer16x cat% / med|dz|</a:t>
+                      </a:r>
+                    </a:p>
+                  </a:txBody>
+                  <a:tcPr/>
+                </a:tc>
+              </a:tr>
+              <a:tr h="339634">
+                <a:tc>
+                  <a:txBody>
+                    <a:bodyPr/>
+                    <a:lstStyle/>
+                    <a:p>
+                      <a:r>
+                        <a:rPr sz="1300">
+                          <a:solidFill>
+                            <a:srgbClr val="222222"/>
+                          </a:solidFill>
+                        </a:rPr>
+                        <a:t>LRG</a:t>
+                      </a:r>
+                    </a:p>
+                  </a:txBody>
+                  <a:tcPr/>
+                </a:tc>
+                <a:tc>
+                  <a:txBody>
+                    <a:bodyPr/>
+                    <a:lstStyle/>
+                    <a:p>
+                      <a:r>
+                        <a:rPr sz="1300">
+                          <a:solidFill>
+                            <a:srgbClr val="222222"/>
+                          </a:solidFill>
+                        </a:rPr>
+                        <a:t>97.5%  /  0.063</a:t>
+                      </a:r>
+                    </a:p>
+                  </a:txBody>
+                  <a:tcPr/>
+                </a:tc>
+                <a:tc>
+                  <a:txBody>
+                    <a:bodyPr/>
+                    <a:lstStyle/>
+                    <a:p>
+                      <a:r>
+                        <a:rPr sz="1300">
+                          <a:solidFill>
+                            <a:srgbClr val="222222"/>
+                          </a:solidFill>
+                        </a:rPr>
+                        <a:t>98.0%  /  0.088</a:t>
+                      </a:r>
+                    </a:p>
+                  </a:txBody>
+                  <a:tcPr/>
+                </a:tc>
+              </a:tr>
+              <a:tr h="339634">
+                <a:tc>
+                  <a:txBody>
+                    <a:bodyPr/>
+                    <a:lstStyle/>
+                    <a:p>
+                      <a:r>
+                        <a:rPr sz="1300">
+                          <a:solidFill>
+                            <a:srgbClr val="222222"/>
+                          </a:solidFill>
+                        </a:rPr>
+                        <a:t>ELG</a:t>
+                      </a:r>
+                    </a:p>
+                  </a:txBody>
+                  <a:tcPr/>
+                </a:tc>
+                <a:tc>
+                  <a:txBody>
+                    <a:bodyPr/>
+                    <a:lstStyle/>
+                    <a:p>
+                      <a:r>
+                        <a:rPr sz="1300">
+                          <a:solidFill>
+                            <a:srgbClr val="222222"/>
+                          </a:solidFill>
+                        </a:rPr>
+                        <a:t>97.8%  /  0.111</a:t>
+                      </a:r>
+                    </a:p>
+                  </a:txBody>
+                  <a:tcPr/>
+                </a:tc>
+                <a:tc>
+                  <a:txBody>
+                    <a:bodyPr/>
+                    <a:lstStyle/>
+                    <a:p>
+                      <a:r>
+                        <a:rPr sz="1300">
+                          <a:solidFill>
+                            <a:srgbClr val="222222"/>
+                          </a:solidFill>
+                        </a:rPr>
+                        <a:t>98.4%  /  0.153</a:t>
+                      </a:r>
+                    </a:p>
+                  </a:txBody>
+                  <a:tcPr/>
+                </a:tc>
+              </a:tr>
+              <a:tr h="339634">
+                <a:tc>
+                  <a:txBody>
+                    <a:bodyPr/>
+                    <a:lstStyle/>
+                    <a:p>
+                      <a:r>
+                        <a:rPr sz="1300">
+                          <a:solidFill>
+                            <a:srgbClr val="222222"/>
+                          </a:solidFill>
+                        </a:rPr>
+                        <a:t>QSO</a:t>
+                      </a:r>
+                    </a:p>
+                  </a:txBody>
+                  <a:tcPr/>
+                </a:tc>
+                <a:tc>
+                  <a:txBody>
+                    <a:bodyPr/>
+                    <a:lstStyle/>
+                    <a:p>
+                      <a:r>
+                        <a:rPr sz="1300">
+                          <a:solidFill>
+                            <a:srgbClr val="222222"/>
+                          </a:solidFill>
+                        </a:rPr>
+                        <a:t>97.3%  /  0.178</a:t>
+                      </a:r>
+                    </a:p>
+                  </a:txBody>
+                  <a:tcPr/>
+                </a:tc>
+                <a:tc>
+                  <a:txBody>
+                    <a:bodyPr/>
+                    <a:lstStyle/>
+                    <a:p>
+                      <a:r>
+                        <a:rPr sz="1300">
+                          <a:solidFill>
+                            <a:srgbClr val="222222"/>
+                          </a:solidFill>
+                        </a:rPr>
+                        <a:t>97.3%  /  0.160</a:t>
+                      </a:r>
+                    </a:p>
+                  </a:txBody>
+                  <a:tcPr/>
+                </a:tc>
+              </a:tr>
+              <a:tr h="339634">
+                <a:tc>
+                  <a:txBody>
+                    <a:bodyPr/>
+                    <a:lstStyle/>
+                    <a:p>
+                      <a:r>
+                        <a:rPr sz="1300">
+                          <a:solidFill>
+                            <a:srgbClr val="222222"/>
+                          </a:solidFill>
+                        </a:rPr>
+                        <a:t>MWS</a:t>
+                      </a:r>
+                    </a:p>
+                  </a:txBody>
+                  <a:tcPr/>
+                </a:tc>
+                <a:tc>
+                  <a:txBody>
+                    <a:bodyPr/>
+                    <a:lstStyle/>
+                    <a:p>
+                      <a:r>
+                        <a:rPr sz="1300">
+                          <a:solidFill>
+                            <a:srgbClr val="222222"/>
+                          </a:solidFill>
+                        </a:rPr>
+                        <a:t>2.1%  /  0.0002</a:t>
+                      </a:r>
+                    </a:p>
+                  </a:txBody>
+                  <a:tcPr/>
+                </a:tc>
+                <a:tc>
+                  <a:txBody>
+                    <a:bodyPr/>
+                    <a:lstStyle/>
+                    <a:p>
+                      <a:r>
+                        <a:rPr sz="1300">
+                          <a:solidFill>
+                            <a:srgbClr val="222222"/>
+                          </a:solidFill>
+                        </a:rPr>
+                        <a:t>2.1%  /  0.0002</a:t>
+                      </a:r>
+                    </a:p>
+                  </a:txBody>
+                  <a:tcPr/>
+                </a:tc>
+              </a:tr>
+              <a:tr h="339634">
+                <a:tc>
+                  <a:txBody>
+                    <a:bodyPr/>
+                    <a:lstStyle/>
+                    <a:p>
+                      <a:r>
+                        <a:rPr sz="1300">
+                          <a:solidFill>
+                            <a:srgbClr val="222222"/>
+                          </a:solidFill>
+                        </a:rPr>
+                        <a:t>BGS</a:t>
+                      </a:r>
+                    </a:p>
+                  </a:txBody>
+                  <a:tcPr/>
+                </a:tc>
+                <a:tc>
+                  <a:txBody>
+                    <a:bodyPr/>
+                    <a:lstStyle/>
+                    <a:p>
+                      <a:r>
+                        <a:rPr sz="1300">
+                          <a:solidFill>
+                            <a:srgbClr val="222222"/>
+                          </a:solidFill>
+                        </a:rPr>
+                        <a:t>95.7%  /  0.036</a:t>
+                      </a:r>
+                    </a:p>
+                  </a:txBody>
+                  <a:tcPr/>
+                </a:tc>
+                <a:tc>
+                  <a:txBody>
+                    <a:bodyPr/>
+                    <a:lstStyle/>
+                    <a:p>
+                      <a:r>
+                        <a:rPr sz="1300">
+                          <a:solidFill>
+                            <a:srgbClr val="222222"/>
+                          </a:solidFill>
+                        </a:rPr>
+                        <a:t>95.1%  /  0.045</a:t>
+                      </a:r>
+                    </a:p>
+                  </a:txBody>
+                  <a:tcPr/>
+                </a:tc>
+              </a:tr>
+              <a:tr h="339636">
+                <a:tc>
+                  <a:txBody>
+                    <a:bodyPr/>
+                    <a:lstStyle/>
+                    <a:p>
+                      <a:r>
+                        <a:rPr sz="1300">
+                          <a:solidFill>
+                            <a:srgbClr val="222222"/>
+                          </a:solidFill>
+                        </a:rPr>
+                        <a:t>aggregate good-z</a:t>
+                      </a:r>
+                    </a:p>
+                  </a:txBody>
+                  <a:tcPr/>
+                </a:tc>
+                <a:tc>
+                  <a:txBody>
+                    <a:bodyPr/>
+                    <a:lstStyle/>
+                    <a:p>
+                      <a:r>
+                        <a:rPr sz="1300">
+                          <a:solidFill>
+                            <a:srgbClr val="222222"/>
+                          </a:solidFill>
+                        </a:rPr>
+                        <a:t>24.1%</a:t>
+                      </a:r>
+                    </a:p>
+                  </a:txBody>
+                  <a:tcPr/>
+                </a:tc>
+                <a:tc>
+                  <a:txBody>
+                    <a:bodyPr/>
+                    <a:lstStyle/>
+                    <a:p>
+                      <a:r>
+                        <a:rPr sz="1300">
+                          <a:solidFill>
+                            <a:srgbClr val="222222"/>
+                          </a:solidFill>
+                        </a:rPr>
+                        <a:t>23.9%</a:t>
+                      </a:r>
+                    </a:p>
+                  </a:txBody>
+                  <a:tcPr/>
+                </a:tc>
+              </a:tr>
+            </a:tbl>
+          </a:graphicData>
+        </a:graphic>
+      </p:graphicFrame>
+      <p:sp>
+        <p:nvSpPr>
+          <p:cNvPr id="5" name="TextBox 4"/>
+          <p:cNvSpPr txBox="1"/>
+          <p:nvPr/>
+        </p:nvSpPr>
+        <p:spPr>
+          <a:xfrm>
+            <a:off x="457200" y="4937760"/>
+            <a:ext cx="11274552" cy="457200"/>
+          </a:xfrm>
+          <a:prstGeom prst="rect">
+            <a:avLst/>
+          </a:prstGeom>
+          <a:noFill/>
+        </p:spPr>
+        <p:txBody>
+          <a:bodyPr wrap="none">
+            <a:spAutoFit/>
+          </a:bodyPr>
+          <a:lstStyle/>
+          <a:p>
+            <a:r>
+              <a:rPr sz="1300" b="0">
+                <a:solidFill>
+                  <a:srgbClr val="C63A3A"/>
+                </a:solidFill>
+              </a:rPr>
+              <a:t>Finer compression does NOT close the gap — statistically identical, galaxy median |dz| marginally WORSE (the opposite of what finer localization predicts). Compression is not the precision bottleneck; finer = 2x sequence for zero gain.</a:t>
+            </a:r>
+          </a:p>
+        </p:txBody>
+      </p:sp>
+      <p:sp>
+        <p:nvSpPr>
+          <p:cNvPr id="6" name="TextBox 5"/>
+          <p:cNvSpPr txBox="1"/>
+          <p:nvPr/>
+        </p:nvSpPr>
+        <p:spPr>
+          <a:xfrm>
+            <a:off x="457200" y="5852160"/>
+            <a:ext cx="11274552" cy="457200"/>
+          </a:xfrm>
+          <a:prstGeom prst="rect">
+            <a:avLst/>
+          </a:prstGeom>
+          <a:noFill/>
+        </p:spPr>
+        <p:txBody>
+          <a:bodyPr wrap="none">
+            <a:spAutoFit/>
+          </a:bodyPr>
+          <a:lstStyle/>
+          <a:p>
+            <a:r>
+              <a:rPr sz="1300" b="0">
+                <a:solidFill>
+                  <a:srgbClr val="182C5B"/>
+                </a:solidFill>
+              </a:rPr>
+              <a:t>Phases 15–17 rule out EVERY local lever (architecture, physics prior, compression) → scale (data/model/steps) is the lever. NERSC spec uses V1 32x.</a:t>
+            </a:r>
+          </a:p>
+        </p:txBody>
+      </p:sp>
+      <p:sp>
+        <p:nvSpPr>
+          <p:cNvPr id="7" name="TextBox 6"/>
+          <p:cNvSpPr txBox="1"/>
+          <p:nvPr/>
+        </p:nvSpPr>
+        <p:spPr>
+          <a:xfrm>
+            <a:off x="457200" y="6400800"/>
+            <a:ext cx="11274552" cy="274320"/>
+          </a:xfrm>
+          <a:prstGeom prst="rect">
+            <a:avLst/>
+          </a:prstGeom>
+          <a:noFill/>
+        </p:spPr>
+        <p:txBody>
+          <a:bodyPr wrap="none">
+            <a:spAutoFit/>
+          </a:bodyPr>
+          <a:lstStyle/>
+          <a:p>
+            <a:r>
+              <a:rPr sz="1100" b="0">
+                <a:solidFill>
+                  <a:srgbClr val="666666"/>
+                </a:solidFill>
+              </a:rPr>
+              <a:t>tools/spectrumfm/eval_per_class.py head-to-head; reproductions/redshifty/NERSC_SCALING_SPEC.md</a:t>
+            </a:r>
+          </a:p>
+        </p:txBody>
+      </p:sp>
+    </p:spTree>
+  </p:cSld>
+  <p:clrMapOvr>
+    <a:masterClrMapping/>
+  </p:clrMapOvr>
+</p:sld>
+</file>
+
+<file path=ppt/slides/slide15.xml><?xml version="1.0" encoding="utf-8"?>
+<p:sld xmlns:a="http://schemas.openxmlformats.org/drawingml/2006/main" xmlns:p="http://schemas.openxmlformats.org/presentationml/2006/main" xmlns:r="http://schemas.openxmlformats.org/officeDocument/2006/relationships">
+  <p:cSld>
+    <p:spTree>
+      <p:nvGrpSpPr>
+        <p:cNvPr id="1" name=""/>
+        <p:cNvGrpSpPr/>
+        <p:nvPr/>
+      </p:nvGrpSpPr>
+      <p:grpSpPr/>
+      <p:sp>
+        <p:nvSpPr>
+          <p:cNvPr id="2" name="TextBox 1"/>
+          <p:cNvSpPr txBox="1"/>
+          <p:nvPr/>
+        </p:nvSpPr>
+        <p:spPr>
+          <a:xfrm>
+            <a:off x="457200" y="365760"/>
+            <a:ext cx="11274552" cy="731520"/>
+          </a:xfrm>
+          <a:prstGeom prst="rect">
+            <a:avLst/>
+          </a:prstGeom>
+          <a:noFill/>
+        </p:spPr>
+        <p:txBody>
+          <a:bodyPr wrap="none">
+            <a:spAutoFit/>
+          </a:bodyPr>
+          <a:lstStyle/>
+          <a:p>
+            <a:r>
+              <a:rPr sz="3200" b="1">
+                <a:solidFill>
+                  <a:srgbClr val="182C5B"/>
+                </a:solidFill>
+              </a:rPr>
               <a:t>What's next</a:t>
             </a:r>
           </a:p>
@@ -5642,7 +6224,7 @@
                   <a:srgbClr val="222222"/>
                 </a:solidFill>
               </a:rPr>
-              <a:t>• DONE: physical-prior ablation (redshift equivariance) — works mechanically, no precision gain</a:t>
+              <a:t>• DONE: physical-prior ablation (equivariance) + compression sweep (finer 16x tokenizer)</a:t>
             </a:r>
           </a:p>
           <a:p>
@@ -5653,7 +6235,7 @@
                   <a:srgbClr val="222222"/>
                 </a:solidFill>
               </a:rPr>
-              <a:t>– Equivariance &amp; absolute precision are decoupled → scale, not aux losses, is the lever</a:t>
+              <a:t>– Both no precision gain → Phases 15–17 rule out EVERY local lever; scale is the lever</a:t>
             </a:r>
           </a:p>
           <a:p>
@@ -5664,7 +6246,7 @@
                   <a:srgbClr val="222222"/>
                 </a:solidFill>
               </a:rPr>
-              <a:t>• Next: local data×model-size scaling ladder (per-point metric = Metric-1 cat. rate + probe-F1)</a:t>
+              <a:t>• DONE: NERSC full-scale spec written (V1 32x, 104M→1.07B ladder, per-class Metric-1 gate)</a:t>
             </a:r>
           </a:p>
           <a:p>
@@ -5675,7 +6257,29 @@
                   <a:srgbClr val="222222"/>
                 </a:solidFill>
               </a:rPr>
-              <a:t>– Then the full-DR1 / 250M–1B-param NERSC spec, with eval_per_class.py as the completion gate</a:t>
+              <a:t>– reproductions/redshifty/NERSC_SCALING_SPEC.md — ready to run</a:t>
+            </a:r>
+          </a:p>
+          <a:p>
+            <a:pPr/>
+            <a:r>
+              <a:rPr sz="1400">
+                <a:solidFill>
+                  <a:srgbClr val="222222"/>
+                </a:solidFill>
+              </a:rPr>
+              <a:t>• Next (optional local): data×model-size scaling ladder to pin the low end of the Metric-3 curve</a:t>
+            </a:r>
+          </a:p>
+          <a:p>
+            <a:pPr/>
+            <a:r>
+              <a:rPr sz="1400">
+                <a:solidFill>
+                  <a:srgbClr val="222222"/>
+                </a:solidFill>
+              </a:rPr>
+              <a:t>• Next (real): full-DR1 / 250M–1B Perlmutter runs — the actual precision verdict</a:t>
             </a:r>
           </a:p>
           <a:p>
@@ -5732,7 +6336,7 @@
 </p:sld>
 </file>
 
-<file path=ppt/slides/slide15.xml><?xml version="1.0" encoding="utf-8"?>
+<file path=ppt/slides/slide16.xml><?xml version="1.0" encoding="utf-8"?>
 <p:sld xmlns:a="http://schemas.openxmlformats.org/drawingml/2006/main" xmlns:p="http://schemas.openxmlformats.org/presentationml/2006/main" xmlns:r="http://schemas.openxmlformats.org/officeDocument/2006/relationships">
   <p:cSld>
     <p:spTree>

--- a/reproductions/redshifty/papers/spectrumfm_status_2026-06-02.pptx
+++ b/reproductions/redshifty/papers/spectrumfm_status_2026-06-02.pptx
@@ -21,6 +21,7 @@
     <p:sldId id="269" r:id="rId20"/>
     <p:sldId id="270" r:id="rId21"/>
     <p:sldId id="271" r:id="rId22"/>
+    <p:sldId id="272" r:id="rId23"/>
   </p:sldIdLst>
   <p:sldSz cx="12188952" cy="6858000" type="screen4x3"/>
   <p:notesSz cx="6858000" cy="9144000"/>
@@ -6102,6 +6103,827 @@
                   <a:srgbClr val="182C5B"/>
                 </a:solidFill>
               </a:rPr>
+              <a:t>Phase 18 — local scaling ladder (does scale help?)</a:t>
+            </a:r>
+          </a:p>
+        </p:txBody>
+      </p:sp>
+      <p:sp>
+        <p:nvSpPr>
+          <p:cNvPr id="3" name="TextBox 2"/>
+          <p:cNvSpPr txBox="1"/>
+          <p:nvPr/>
+        </p:nvSpPr>
+        <p:spPr>
+          <a:xfrm>
+            <a:off x="457200" y="960120"/>
+            <a:ext cx="11274552" cy="457200"/>
+          </a:xfrm>
+          <a:prstGeom prst="rect">
+            <a:avLst/>
+          </a:prstGeom>
+          <a:noFill/>
+        </p:spPr>
+        <p:txBody>
+          <a:bodyPr wrap="none">
+            <a:spAutoFit/>
+          </a:bodyPr>
+          <a:lstStyle/>
+          <a:p>
+            <a:r>
+              <a:rPr sz="1400" b="0">
+                <a:solidFill>
+                  <a:srgbClr val="666666"/>
+                </a:solidFill>
+              </a:rPr>
+              <a:t>Model-size ladder 13–104M params, 8k steps, eff-batch 64, n=4096 eval; endpoints seed-replicated for noise bars</a:t>
+            </a:r>
+          </a:p>
+        </p:txBody>
+      </p:sp>
+      <p:graphicFrame>
+        <p:nvGraphicFramePr>
+          <p:cNvPr id="4" name="Table 3"/>
+          <p:cNvGraphicFramePr>
+            <a:graphicFrameLocks noGrp="1"/>
+          </p:cNvGraphicFramePr>
+          <p:nvPr/>
+        </p:nvGraphicFramePr>
+        <p:xfrm>
+          <a:off x="457200" y="457200"/>
+          <a:ext cx="9692640" cy="2194560"/>
+        </p:xfrm>
+        <a:graphic>
+          <a:graphicData uri="http://schemas.openxmlformats.org/drawingml/2006/table">
+            <a:tbl>
+              <a:tblPr firstRow="1" bandRow="1">
+                <a:tableStyleId>{5C22544A-7EE6-4342-B048-85BDC9FD1C3A}</a:tableStyleId>
+              </a:tblPr>
+              <a:tblGrid>
+                <a:gridCol w="1463040"/>
+                <a:gridCol w="1645920"/>
+                <a:gridCol w="1097280"/>
+                <a:gridCol w="4023360"/>
+                <a:gridCol w="1463040"/>
+              </a:tblGrid>
+              <a:tr h="313508">
+                <a:tc>
+                  <a:txBody>
+                    <a:bodyPr/>
+                    <a:lstStyle/>
+                    <a:p>
+                      <a:r>
+                        <a:rPr sz="1300" b="1">
+                          <a:solidFill>
+                            <a:srgbClr val="182C5B"/>
+                          </a:solidFill>
+                        </a:rPr>
+                        <a:t>d_model</a:t>
+                      </a:r>
+                    </a:p>
+                  </a:txBody>
+                  <a:tcPr/>
+                </a:tc>
+                <a:tc>
+                  <a:txBody>
+                    <a:bodyPr/>
+                    <a:lstStyle/>
+                    <a:p>
+                      <a:r>
+                        <a:rPr sz="1300" b="1">
+                          <a:solidFill>
+                            <a:srgbClr val="182C5B"/>
+                          </a:solidFill>
+                        </a:rPr>
+                        <a:t>params</a:t>
+                      </a:r>
+                    </a:p>
+                  </a:txBody>
+                  <a:tcPr/>
+                </a:tc>
+                <a:tc>
+                  <a:txBody>
+                    <a:bodyPr/>
+                    <a:lstStyle/>
+                    <a:p>
+                      <a:r>
+                        <a:rPr sz="1300" b="1">
+                          <a:solidFill>
+                            <a:srgbClr val="182C5B"/>
+                          </a:solidFill>
+                        </a:rPr>
+                        <a:t>seed</a:t>
+                      </a:r>
+                    </a:p>
+                  </a:txBody>
+                  <a:tcPr/>
+                </a:tc>
+                <a:tc>
+                  <a:txBody>
+                    <a:bodyPr/>
+                    <a:lstStyle/>
+                    <a:p>
+                      <a:r>
+                        <a:rPr sz="1300" b="1">
+                          <a:solidFill>
+                            <a:srgbClr val="182C5B"/>
+                          </a:solidFill>
+                        </a:rPr>
+                        <a:t>good-z</a:t>
+                      </a:r>
+                    </a:p>
+                  </a:txBody>
+                  <a:tcPr/>
+                </a:tc>
+                <a:tc>
+                  <a:txBody>
+                    <a:bodyPr/>
+                    <a:lstStyle/>
+                    <a:p>
+                      <a:r>
+                        <a:rPr sz="1300" b="1">
+                          <a:solidFill>
+                            <a:srgbClr val="182C5B"/>
+                          </a:solidFill>
+                        </a:rPr>
+                        <a:t>gal-cat</a:t>
+                      </a:r>
+                    </a:p>
+                  </a:txBody>
+                  <a:tcPr/>
+                </a:tc>
+              </a:tr>
+              <a:tr h="313508">
+                <a:tc>
+                  <a:txBody>
+                    <a:bodyPr/>
+                    <a:lstStyle/>
+                    <a:p>
+                      <a:r>
+                        <a:rPr sz="1300">
+                          <a:solidFill>
+                            <a:srgbClr val="222222"/>
+                          </a:solidFill>
+                        </a:rPr>
+                        <a:t>256</a:t>
+                      </a:r>
+                    </a:p>
+                  </a:txBody>
+                  <a:tcPr/>
+                </a:tc>
+                <a:tc>
+                  <a:txBody>
+                    <a:bodyPr/>
+                    <a:lstStyle/>
+                    <a:p>
+                      <a:r>
+                        <a:rPr sz="1300">
+                          <a:solidFill>
+                            <a:srgbClr val="222222"/>
+                          </a:solidFill>
+                        </a:rPr>
+                        <a:t>13.1M</a:t>
+                      </a:r>
+                    </a:p>
+                  </a:txBody>
+                  <a:tcPr/>
+                </a:tc>
+                <a:tc>
+                  <a:txBody>
+                    <a:bodyPr/>
+                    <a:lstStyle/>
+                    <a:p>
+                      <a:r>
+                        <a:rPr sz="1300">
+                          <a:solidFill>
+                            <a:srgbClr val="222222"/>
+                          </a:solidFill>
+                        </a:rPr>
+                        <a:t>42</a:t>
+                      </a:r>
+                    </a:p>
+                  </a:txBody>
+                  <a:tcPr/>
+                </a:tc>
+                <a:tc>
+                  <a:txBody>
+                    <a:bodyPr/>
+                    <a:lstStyle/>
+                    <a:p>
+                      <a:r>
+                        <a:rPr sz="1300">
+                          <a:solidFill>
+                            <a:srgbClr val="222222"/>
+                          </a:solidFill>
+                        </a:rPr>
+                        <a:t>0.222</a:t>
+                      </a:r>
+                    </a:p>
+                  </a:txBody>
+                  <a:tcPr/>
+                </a:tc>
+                <a:tc>
+                  <a:txBody>
+                    <a:bodyPr/>
+                    <a:lstStyle/>
+                    <a:p>
+                      <a:r>
+                        <a:rPr sz="1300">
+                          <a:solidFill>
+                            <a:srgbClr val="222222"/>
+                          </a:solidFill>
+                        </a:rPr>
+                        <a:t>0.960</a:t>
+                      </a:r>
+                    </a:p>
+                  </a:txBody>
+                  <a:tcPr/>
+                </a:tc>
+              </a:tr>
+              <a:tr h="313508">
+                <a:tc>
+                  <a:txBody>
+                    <a:bodyPr/>
+                    <a:lstStyle/>
+                    <a:p>
+                      <a:r>
+                        <a:rPr sz="1300">
+                          <a:solidFill>
+                            <a:srgbClr val="222222"/>
+                          </a:solidFill>
+                        </a:rPr>
+                        <a:t>384</a:t>
+                      </a:r>
+                    </a:p>
+                  </a:txBody>
+                  <a:tcPr/>
+                </a:tc>
+                <a:tc>
+                  <a:txBody>
+                    <a:bodyPr/>
+                    <a:lstStyle/>
+                    <a:p>
+                      <a:r>
+                        <a:rPr sz="1300">
+                          <a:solidFill>
+                            <a:srgbClr val="222222"/>
+                          </a:solidFill>
+                        </a:rPr>
+                        <a:t>26.8M</a:t>
+                      </a:r>
+                    </a:p>
+                  </a:txBody>
+                  <a:tcPr/>
+                </a:tc>
+                <a:tc>
+                  <a:txBody>
+                    <a:bodyPr/>
+                    <a:lstStyle/>
+                    <a:p>
+                      <a:r>
+                        <a:rPr sz="1300">
+                          <a:solidFill>
+                            <a:srgbClr val="222222"/>
+                          </a:solidFill>
+                        </a:rPr>
+                        <a:t>42</a:t>
+                      </a:r>
+                    </a:p>
+                  </a:txBody>
+                  <a:tcPr/>
+                </a:tc>
+                <a:tc>
+                  <a:txBody>
+                    <a:bodyPr/>
+                    <a:lstStyle/>
+                    <a:p>
+                      <a:r>
+                        <a:rPr sz="1300">
+                          <a:solidFill>
+                            <a:srgbClr val="222222"/>
+                          </a:solidFill>
+                        </a:rPr>
+                        <a:t>0.221</a:t>
+                      </a:r>
+                    </a:p>
+                  </a:txBody>
+                  <a:tcPr/>
+                </a:tc>
+                <a:tc>
+                  <a:txBody>
+                    <a:bodyPr/>
+                    <a:lstStyle/>
+                    <a:p>
+                      <a:r>
+                        <a:rPr sz="1300">
+                          <a:solidFill>
+                            <a:srgbClr val="222222"/>
+                          </a:solidFill>
+                        </a:rPr>
+                        <a:t>0.956</a:t>
+                      </a:r>
+                    </a:p>
+                  </a:txBody>
+                  <a:tcPr/>
+                </a:tc>
+              </a:tr>
+              <a:tr h="313508">
+                <a:tc>
+                  <a:txBody>
+                    <a:bodyPr/>
+                    <a:lstStyle/>
+                    <a:p>
+                      <a:r>
+                        <a:rPr sz="1300">
+                          <a:solidFill>
+                            <a:srgbClr val="222222"/>
+                          </a:solidFill>
+                        </a:rPr>
+                        <a:t>512</a:t>
+                      </a:r>
+                    </a:p>
+                  </a:txBody>
+                  <a:tcPr/>
+                </a:tc>
+                <a:tc>
+                  <a:txBody>
+                    <a:bodyPr/>
+                    <a:lstStyle/>
+                    <a:p>
+                      <a:r>
+                        <a:rPr sz="1300">
+                          <a:solidFill>
+                            <a:srgbClr val="222222"/>
+                          </a:solidFill>
+                        </a:rPr>
+                        <a:t>50.0M</a:t>
+                      </a:r>
+                    </a:p>
+                  </a:txBody>
+                  <a:tcPr/>
+                </a:tc>
+                <a:tc>
+                  <a:txBody>
+                    <a:bodyPr/>
+                    <a:lstStyle/>
+                    <a:p>
+                      <a:r>
+                        <a:rPr sz="1300">
+                          <a:solidFill>
+                            <a:srgbClr val="222222"/>
+                          </a:solidFill>
+                        </a:rPr>
+                        <a:t>42</a:t>
+                      </a:r>
+                    </a:p>
+                  </a:txBody>
+                  <a:tcPr/>
+                </a:tc>
+                <a:tc>
+                  <a:txBody>
+                    <a:bodyPr/>
+                    <a:lstStyle/>
+                    <a:p>
+                      <a:r>
+                        <a:rPr sz="1300">
+                          <a:solidFill>
+                            <a:srgbClr val="222222"/>
+                          </a:solidFill>
+                        </a:rPr>
+                        <a:t>0.232</a:t>
+                      </a:r>
+                    </a:p>
+                  </a:txBody>
+                  <a:tcPr/>
+                </a:tc>
+                <a:tc>
+                  <a:txBody>
+                    <a:bodyPr/>
+                    <a:lstStyle/>
+                    <a:p>
+                      <a:r>
+                        <a:rPr sz="1300">
+                          <a:solidFill>
+                            <a:srgbClr val="222222"/>
+                          </a:solidFill>
+                        </a:rPr>
+                        <a:t>0.962</a:t>
+                      </a:r>
+                    </a:p>
+                  </a:txBody>
+                  <a:tcPr/>
+                </a:tc>
+              </a:tr>
+              <a:tr h="313508">
+                <a:tc>
+                  <a:txBody>
+                    <a:bodyPr/>
+                    <a:lstStyle/>
+                    <a:p>
+                      <a:r>
+                        <a:rPr sz="1300">
+                          <a:solidFill>
+                            <a:srgbClr val="222222"/>
+                          </a:solidFill>
+                        </a:rPr>
+                        <a:t>768</a:t>
+                      </a:r>
+                    </a:p>
+                  </a:txBody>
+                  <a:tcPr/>
+                </a:tc>
+                <a:tc>
+                  <a:txBody>
+                    <a:bodyPr/>
+                    <a:lstStyle/>
+                    <a:p>
+                      <a:r>
+                        <a:rPr sz="1300">
+                          <a:solidFill>
+                            <a:srgbClr val="222222"/>
+                          </a:solidFill>
+                        </a:rPr>
+                        <a:t>103.7M</a:t>
+                      </a:r>
+                    </a:p>
+                  </a:txBody>
+                  <a:tcPr/>
+                </a:tc>
+                <a:tc>
+                  <a:txBody>
+                    <a:bodyPr/>
+                    <a:lstStyle/>
+                    <a:p>
+                      <a:r>
+                        <a:rPr sz="1300">
+                          <a:solidFill>
+                            <a:srgbClr val="222222"/>
+                          </a:solidFill>
+                        </a:rPr>
+                        <a:t>42</a:t>
+                      </a:r>
+                    </a:p>
+                  </a:txBody>
+                  <a:tcPr/>
+                </a:tc>
+                <a:tc>
+                  <a:txBody>
+                    <a:bodyPr/>
+                    <a:lstStyle/>
+                    <a:p>
+                      <a:r>
+                        <a:rPr sz="1300">
+                          <a:solidFill>
+                            <a:srgbClr val="222222"/>
+                          </a:solidFill>
+                        </a:rPr>
+                        <a:t>0.215</a:t>
+                      </a:r>
+                    </a:p>
+                  </a:txBody>
+                  <a:tcPr/>
+                </a:tc>
+                <a:tc>
+                  <a:txBody>
+                    <a:bodyPr/>
+                    <a:lstStyle/>
+                    <a:p>
+                      <a:r>
+                        <a:rPr sz="1300">
+                          <a:solidFill>
+                            <a:srgbClr val="222222"/>
+                          </a:solidFill>
+                        </a:rPr>
+                        <a:t>0.966</a:t>
+                      </a:r>
+                    </a:p>
+                  </a:txBody>
+                  <a:tcPr/>
+                </a:tc>
+              </a:tr>
+              <a:tr h="313508">
+                <a:tc>
+                  <a:txBody>
+                    <a:bodyPr/>
+                    <a:lstStyle/>
+                    <a:p>
+                      <a:r>
+                        <a:rPr sz="1300">
+                          <a:solidFill>
+                            <a:srgbClr val="222222"/>
+                          </a:solidFill>
+                        </a:rPr>
+                        <a:t>256</a:t>
+                      </a:r>
+                    </a:p>
+                  </a:txBody>
+                  <a:tcPr/>
+                </a:tc>
+                <a:tc>
+                  <a:txBody>
+                    <a:bodyPr/>
+                    <a:lstStyle/>
+                    <a:p>
+                      <a:r>
+                        <a:rPr sz="1300">
+                          <a:solidFill>
+                            <a:srgbClr val="222222"/>
+                          </a:solidFill>
+                        </a:rPr>
+                        <a:t>13.1M</a:t>
+                      </a:r>
+                    </a:p>
+                  </a:txBody>
+                  <a:tcPr/>
+                </a:tc>
+                <a:tc>
+                  <a:txBody>
+                    <a:bodyPr/>
+                    <a:lstStyle/>
+                    <a:p>
+                      <a:r>
+                        <a:rPr sz="1300">
+                          <a:solidFill>
+                            <a:srgbClr val="222222"/>
+                          </a:solidFill>
+                        </a:rPr>
+                        <a:t>123</a:t>
+                      </a:r>
+                    </a:p>
+                  </a:txBody>
+                  <a:tcPr/>
+                </a:tc>
+                <a:tc>
+                  <a:txBody>
+                    <a:bodyPr/>
+                    <a:lstStyle/>
+                    <a:p>
+                      <a:r>
+                        <a:rPr sz="1300">
+                          <a:solidFill>
+                            <a:srgbClr val="222222"/>
+                          </a:solidFill>
+                        </a:rPr>
+                        <a:t>0.102  (12pp seed swing!)</a:t>
+                      </a:r>
+                    </a:p>
+                  </a:txBody>
+                  <a:tcPr/>
+                </a:tc>
+                <a:tc>
+                  <a:txBody>
+                    <a:bodyPr/>
+                    <a:lstStyle/>
+                    <a:p>
+                      <a:r>
+                        <a:rPr sz="1300">
+                          <a:solidFill>
+                            <a:srgbClr val="222222"/>
+                          </a:solidFill>
+                        </a:rPr>
+                        <a:t>0.974</a:t>
+                      </a:r>
+                    </a:p>
+                  </a:txBody>
+                  <a:tcPr/>
+                </a:tc>
+              </a:tr>
+              <a:tr h="313512">
+                <a:tc>
+                  <a:txBody>
+                    <a:bodyPr/>
+                    <a:lstStyle/>
+                    <a:p>
+                      <a:r>
+                        <a:rPr sz="1300">
+                          <a:solidFill>
+                            <a:srgbClr val="222222"/>
+                          </a:solidFill>
+                        </a:rPr>
+                        <a:t>768</a:t>
+                      </a:r>
+                    </a:p>
+                  </a:txBody>
+                  <a:tcPr/>
+                </a:tc>
+                <a:tc>
+                  <a:txBody>
+                    <a:bodyPr/>
+                    <a:lstStyle/>
+                    <a:p>
+                      <a:r>
+                        <a:rPr sz="1300">
+                          <a:solidFill>
+                            <a:srgbClr val="222222"/>
+                          </a:solidFill>
+                        </a:rPr>
+                        <a:t>103.7M</a:t>
+                      </a:r>
+                    </a:p>
+                  </a:txBody>
+                  <a:tcPr/>
+                </a:tc>
+                <a:tc>
+                  <a:txBody>
+                    <a:bodyPr/>
+                    <a:lstStyle/>
+                    <a:p>
+                      <a:r>
+                        <a:rPr sz="1300">
+                          <a:solidFill>
+                            <a:srgbClr val="222222"/>
+                          </a:solidFill>
+                        </a:rPr>
+                        <a:t>123</a:t>
+                      </a:r>
+                    </a:p>
+                  </a:txBody>
+                  <a:tcPr/>
+                </a:tc>
+                <a:tc>
+                  <a:txBody>
+                    <a:bodyPr/>
+                    <a:lstStyle/>
+                    <a:p>
+                      <a:r>
+                        <a:rPr sz="1300">
+                          <a:solidFill>
+                            <a:srgbClr val="222222"/>
+                          </a:solidFill>
+                        </a:rPr>
+                        <a:t>0.213  (0.2pp seed swing)</a:t>
+                      </a:r>
+                    </a:p>
+                  </a:txBody>
+                  <a:tcPr/>
+                </a:tc>
+                <a:tc>
+                  <a:txBody>
+                    <a:bodyPr/>
+                    <a:lstStyle/>
+                    <a:p>
+                      <a:r>
+                        <a:rPr sz="1300">
+                          <a:solidFill>
+                            <a:srgbClr val="222222"/>
+                          </a:solidFill>
+                        </a:rPr>
+                        <a:t>0.971</a:t>
+                      </a:r>
+                    </a:p>
+                  </a:txBody>
+                  <a:tcPr/>
+                </a:tc>
+              </a:tr>
+            </a:tbl>
+          </a:graphicData>
+        </a:graphic>
+      </p:graphicFrame>
+      <p:sp>
+        <p:nvSpPr>
+          <p:cNvPr id="5" name="TextBox 4"/>
+          <p:cNvSpPr txBox="1"/>
+          <p:nvPr/>
+        </p:nvSpPr>
+        <p:spPr>
+          <a:xfrm>
+            <a:off x="457200" y="5029200"/>
+            <a:ext cx="11274552" cy="457200"/>
+          </a:xfrm>
+          <a:prstGeom prst="rect">
+            <a:avLst/>
+          </a:prstGeom>
+          <a:noFill/>
+        </p:spPr>
+        <p:txBody>
+          <a:bodyPr wrap="none">
+            <a:spAutoFit/>
+          </a:bodyPr>
+          <a:lstStyle/>
+          <a:p>
+            <a:r>
+              <a:rPr sz="1300" b="0">
+                <a:solidFill>
+                  <a:srgbClr val="C63A3A"/>
+                </a:solidFill>
+              </a:rPr>
+              <a:t>good-z slope = −0.004/decade (R²=0.04): FLAT. Galaxy ceiling ~22% at every size. Scale buys training STABILITY (small model = coin-flip ignition; large = stable), NOT a higher galaxy ceiling.</a:t>
+            </a:r>
+          </a:p>
+        </p:txBody>
+      </p:sp>
+      <p:sp>
+        <p:nvSpPr>
+          <p:cNvPr id="6" name="TextBox 5"/>
+          <p:cNvSpPr txBox="1"/>
+          <p:nvPr/>
+        </p:nvSpPr>
+        <p:spPr>
+          <a:xfrm>
+            <a:off x="457200" y="5943600"/>
+            <a:ext cx="11274552" cy="457200"/>
+          </a:xfrm>
+          <a:prstGeom prst="rect">
+            <a:avLst/>
+          </a:prstGeom>
+          <a:noFill/>
+        </p:spPr>
+        <p:txBody>
+          <a:bodyPr wrap="none">
+            <a:spAutoFit/>
+          </a:bodyPr>
+          <a:lstStyle/>
+          <a:p>
+            <a:r>
+              <a:rPr sz="1300" b="0">
+                <a:solidFill>
+                  <a:srgbClr val="182C5B"/>
+                </a:solidFill>
+              </a:rPr>
+              <a:t>Flat LOCAL slope is pre-threshold → inconclusive re NERSC (galaxy z is a phase transition: ref 8%→73.8% over 219k→394k spectra). Precision verdict deferred to full scale.</a:t>
+            </a:r>
+          </a:p>
+        </p:txBody>
+      </p:sp>
+      <p:sp>
+        <p:nvSpPr>
+          <p:cNvPr id="7" name="TextBox 6"/>
+          <p:cNvSpPr txBox="1"/>
+          <p:nvPr/>
+        </p:nvSpPr>
+        <p:spPr>
+          <a:xfrm>
+            <a:off x="457200" y="6400800"/>
+            <a:ext cx="11274552" cy="274320"/>
+          </a:xfrm>
+          <a:prstGeom prst="rect">
+            <a:avLst/>
+          </a:prstGeom>
+          <a:noFill/>
+        </p:spPr>
+        <p:txBody>
+          <a:bodyPr wrap="none">
+            <a:spAutoFit/>
+          </a:bodyPr>
+          <a:lstStyle/>
+          <a:p>
+            <a:r>
+              <a:rPr sz="1100" b="0">
+                <a:solidFill>
+                  <a:srgbClr val="666666"/>
+                </a:solidFill>
+              </a:rPr>
+              <a:t>tools/spectrumfm/scaling_ladder.py; figures/scaling_ladder.png; every local lever now exhausted (Phases 15–18)</a:t>
+            </a:r>
+          </a:p>
+        </p:txBody>
+      </p:sp>
+    </p:spTree>
+  </p:cSld>
+  <p:clrMapOvr>
+    <a:masterClrMapping/>
+  </p:clrMapOvr>
+</p:sld>
+</file>
+
+<file path=ppt/slides/slide16.xml><?xml version="1.0" encoding="utf-8"?>
+<p:sld xmlns:a="http://schemas.openxmlformats.org/drawingml/2006/main" xmlns:p="http://schemas.openxmlformats.org/presentationml/2006/main" xmlns:r="http://schemas.openxmlformats.org/officeDocument/2006/relationships">
+  <p:cSld>
+    <p:spTree>
+      <p:nvGrpSpPr>
+        <p:cNvPr id="1" name=""/>
+        <p:cNvGrpSpPr/>
+        <p:nvPr/>
+      </p:nvGrpSpPr>
+      <p:grpSpPr/>
+      <p:sp>
+        <p:nvSpPr>
+          <p:cNvPr id="2" name="TextBox 1"/>
+          <p:cNvSpPr txBox="1"/>
+          <p:nvPr/>
+        </p:nvSpPr>
+        <p:spPr>
+          <a:xfrm>
+            <a:off x="457200" y="365760"/>
+            <a:ext cx="11274552" cy="731520"/>
+          </a:xfrm>
+          <a:prstGeom prst="rect">
+            <a:avLst/>
+          </a:prstGeom>
+          <a:noFill/>
+        </p:spPr>
+        <p:txBody>
+          <a:bodyPr wrap="none">
+            <a:spAutoFit/>
+          </a:bodyPr>
+          <a:lstStyle/>
+          <a:p>
+            <a:r>
+              <a:rPr sz="3200" b="1">
+                <a:solidFill>
+                  <a:srgbClr val="182C5B"/>
+                </a:solidFill>
+              </a:rPr>
               <a:t>What's next</a:t>
             </a:r>
           </a:p>
@@ -6336,7 +7158,7 @@
 </p:sld>
 </file>
 
-<file path=ppt/slides/slide16.xml><?xml version="1.0" encoding="utf-8"?>
+<file path=ppt/slides/slide17.xml><?xml version="1.0" encoding="utf-8"?>
 <p:sld xmlns:a="http://schemas.openxmlformats.org/drawingml/2006/main" xmlns:p="http://schemas.openxmlformats.org/presentationml/2006/main" xmlns:r="http://schemas.openxmlformats.org/officeDocument/2006/relationships">
   <p:cSld>
     <p:spTree>
